--- a/diagrams/과제배경-슬라이드.pptx
+++ b/diagrams/과제배경-슬라이드.pptx
@@ -5,11 +5,12 @@
     <p:sldMasterId id="2147483648" r:id="rId1"/>
   </p:sldMasterIdLst>
   <p:sldIdLst>
-    <p:sldId id="256" r:id="rId7"/>
-    <p:sldId id="257" r:id="rId8"/>
-    <p:sldId id="258" r:id="rId9"/>
+    <p:sldId id="256" r:id="rId2"/>
+    <p:sldId id="257" r:id="rId3"/>
+    <p:sldId id="258" r:id="rId4"/>
+    <p:sldId id="259" r:id="rId5"/>
   </p:sldIdLst>
-  <p:sldSz cx="12191695" cy="6858000" type="screen4x3"/>
+  <p:sldSz cx="12192000" cy="6858000"/>
   <p:notesSz cx="6858000" cy="9144000"/>
   <p:defaultTextStyle>
     <a:defPPr>
@@ -106,15 +107,35 @@
       </a:defRPr>
     </a:lvl9pPr>
   </p:defaultTextStyle>
+  <p:extLst>
+    <p:ext uri="{EFAFB233-063F-42B5-8137-9DF3F51BA10A}">
+      <p15:sldGuideLst xmlns:p15="http://schemas.microsoft.com/office/powerpoint/2012/main">
+        <p15:guide id="1" orient="horz" pos="2160">
+          <p15:clr>
+            <a:srgbClr val="A4A3A4"/>
+          </p15:clr>
+        </p15:guide>
+        <p15:guide id="2" pos="2880">
+          <p15:clr>
+            <a:srgbClr val="A4A3A4"/>
+          </p15:clr>
+        </p15:guide>
+      </p15:sldGuideLst>
+    </p:ext>
+  </p:extLst>
 </p:presentation>
 </file>
 
 <file path=ppt/charts/chart1.xml><?xml version="1.0" encoding="utf-8"?>
-<c:chartSpace xmlns:c="http://schemas.openxmlformats.org/drawingml/2006/chart" xmlns:a="http://schemas.openxmlformats.org/drawingml/2006/main" xmlns:r="http://schemas.openxmlformats.org/officeDocument/2006/relationships">
+<c:chartSpace xmlns:c="http://schemas.openxmlformats.org/drawingml/2006/chart" xmlns:a="http://schemas.openxmlformats.org/drawingml/2006/main" xmlns:r="http://schemas.openxmlformats.org/officeDocument/2006/relationships" xmlns:c16r2="http://schemas.microsoft.com/office/drawing/2015/06/chart">
   <c:date1904 val="0"/>
+  <c:lang val="ko-KR"/>
+  <c:roundedCorners val="1"/>
+  <c:style val="2"/>
   <c:chart>
     <c:autoTitleDeleted val="1"/>
     <c:plotArea>
+      <c:layout/>
       <c:barChart>
         <c:barDir val="col"/>
         <c:grouping val="clustered"/>
@@ -138,22 +159,70 @@
               <a:srgbClr val="7F7F7F"/>
             </a:solidFill>
           </c:spPr>
+          <c:invertIfNegative val="1"/>
           <c:dPt>
             <c:idx val="0"/>
-            <c:spPr>
-              <a:solidFill>
-                <a:srgbClr val="7F7F7F"/>
-              </a:solidFill>
-            </c:spPr>
+            <c:invertIfNegative val="1"/>
+            <c:bubble3D val="0"/>
+            <c:extLst>
+              <c:ext xmlns:c16="http://schemas.microsoft.com/office/drawing/2014/chart" uri="{C3380CC4-5D6E-409C-BE32-E72D297353CC}">
+                <c16:uniqueId val="{00000001-61D4-4955-9A7E-8BD4C3764BD6}"/>
+              </c:ext>
+            </c:extLst>
           </c:dPt>
           <c:dPt>
             <c:idx val="1"/>
+            <c:invertIfNegative val="1"/>
+            <c:bubble3D val="0"/>
             <c:spPr>
               <a:solidFill>
                 <a:srgbClr val="1F3864"/>
               </a:solidFill>
             </c:spPr>
+            <c:extLst>
+              <c:ext xmlns:c16="http://schemas.microsoft.com/office/drawing/2014/chart" uri="{C3380CC4-5D6E-409C-BE32-E72D297353CC}">
+                <c16:uniqueId val="{00000003-61D4-4955-9A7E-8BD4C3764BD6}"/>
+              </c:ext>
+            </c:extLst>
           </c:dPt>
+          <c:dLbls>
+            <c:numFmt formatCode="0.0" sourceLinked="0"/>
+            <c:spPr>
+              <a:noFill/>
+              <a:ln>
+                <a:noFill/>
+              </a:ln>
+              <a:effectLst/>
+            </c:spPr>
+            <c:txPr>
+              <a:bodyPr/>
+              <a:lstStyle/>
+              <a:p>
+                <a:pPr>
+                  <a:defRPr sz="900" b="1">
+                    <a:solidFill>
+                      <a:srgbClr val="1F3864"/>
+                    </a:solidFill>
+                    <a:latin typeface="맑은 고딕"/>
+                  </a:defRPr>
+                </a:pPr>
+                <a:endParaRPr lang="ko-KR"/>
+              </a:p>
+            </c:txPr>
+            <c:dLblPos val="outEnd"/>
+            <c:showLegendKey val="0"/>
+            <c:showVal val="1"/>
+            <c:showCatName val="0"/>
+            <c:showSerName val="0"/>
+            <c:showPercent val="0"/>
+            <c:showBubbleSize val="0"/>
+            <c:showLeaderLines val="0"/>
+            <c:extLst>
+              <c:ext xmlns:c15="http://schemas.microsoft.com/office/drawing/2012/chart" uri="{CE6537A1-D6FC-4f65-9D91-7224C49458BB}">
+                <c15:showLeaderLines val="0"/>
+              </c:ext>
+            </c:extLst>
+          </c:dLbls>
           <c:cat>
             <c:strRef>
               <c:f>Sheet1!$A$2:$A$3</c:f>
@@ -183,23 +252,22 @@
               </c:numCache>
             </c:numRef>
           </c:val>
+          <c:extLst>
+            <c:ext xmlns:c14="http://schemas.microsoft.com/office/drawing/2007/8/2/chart" uri="{6F2FDCE9-48DA-4B69-8628-5D25D57E5C99}">
+              <c14:invertSolidFillFmt>
+                <c14:spPr xmlns:c14="http://schemas.microsoft.com/office/drawing/2007/8/2/chart">
+                  <a:solidFill>
+                    <a:srgbClr val="FFFFFF"/>
+                  </a:solidFill>
+                </c14:spPr>
+              </c14:invertSolidFillFmt>
+            </c:ext>
+            <c:ext xmlns:c16="http://schemas.microsoft.com/office/drawing/2014/chart" uri="{C3380CC4-5D6E-409C-BE32-E72D297353CC}">
+              <c16:uniqueId val="{00000004-61D4-4955-9A7E-8BD4C3764BD6}"/>
+            </c:ext>
+          </c:extLst>
         </c:ser>
         <c:dLbls>
-          <c:numFmt formatCode="0.0" sourceLinked="0"/>
-          <c:txPr>
-            <a:bodyPr/>
-            <a:lstStyle/>
-            <a:p>
-              <a:pPr>
-                <a:defRPr sz="900" b="1">
-                  <a:solidFill>
-                    <a:srgbClr val="1F3864"/>
-                  </a:solidFill>
-                  <a:latin typeface="맑은 고딕"/>
-                </a:defRPr>
-              </a:pPr>
-            </a:p>
-          </c:txPr>
           <c:dLblPos val="outEnd"/>
           <c:showLegendKey val="0"/>
           <c:showVal val="1"/>
@@ -207,7 +275,6 @@
           <c:showSerName val="0"/>
           <c:showPercent val="0"/>
           <c:showBubbleSize val="0"/>
-          <c:showLeaderLines val="1"/>
         </c:dLbls>
         <c:gapWidth val="60"/>
         <c:axId val="-2068027336"/>
@@ -220,6 +287,7 @@
         </c:scaling>
         <c:delete val="0"/>
         <c:axPos val="b"/>
+        <c:numFmt formatCode="General" sourceLinked="0"/>
         <c:majorTickMark val="none"/>
         <c:minorTickMark val="none"/>
         <c:tickLblPos val="nextTo"/>
@@ -239,6 +307,7 @@
                 <a:latin typeface="맑은 고딕"/>
               </a:defRPr>
             </a:pPr>
+            <a:endParaRPr lang="ko-KR"/>
           </a:p>
         </c:txPr>
         <c:crossAx val="-2113994440"/>
@@ -250,22 +319,23 @@
       </c:catAx>
       <c:valAx>
         <c:axId val="-2113994440"/>
-        <c:scaling/>
-        <c:delete/>
+        <c:scaling>
+          <c:orientation val="minMax"/>
+        </c:scaling>
+        <c:delete val="1"/>
         <c:axPos val="l"/>
+        <c:numFmt formatCode="General" sourceLinked="1"/>
         <c:majorTickMark val="none"/>
         <c:minorTickMark val="none"/>
         <c:tickLblPos val="nextTo"/>
-        <c:spPr>
-          <a:ln>
-            <a:noFill/>
-          </a:ln>
-        </c:spPr>
         <c:crossAx val="-2068027336"/>
         <c:crosses val="autoZero"/>
+        <c:crossBetween val="between"/>
       </c:valAx>
     </c:plotArea>
+    <c:plotVisOnly val="1"/>
     <c:dispBlanksAs val="gap"/>
+    <c:showDLblsOverMax val="1"/>
   </c:chart>
   <c:txPr>
     <a:bodyPr/>
@@ -284,11 +354,15 @@
 </file>
 
 <file path=ppt/charts/chart2.xml><?xml version="1.0" encoding="utf-8"?>
-<c:chartSpace xmlns:c="http://schemas.openxmlformats.org/drawingml/2006/chart" xmlns:a="http://schemas.openxmlformats.org/drawingml/2006/main" xmlns:r="http://schemas.openxmlformats.org/officeDocument/2006/relationships">
+<c:chartSpace xmlns:c="http://schemas.openxmlformats.org/drawingml/2006/chart" xmlns:a="http://schemas.openxmlformats.org/drawingml/2006/main" xmlns:r="http://schemas.openxmlformats.org/officeDocument/2006/relationships" xmlns:c16r2="http://schemas.microsoft.com/office/drawing/2015/06/chart">
   <c:date1904 val="0"/>
+  <c:lang val="ko-KR"/>
+  <c:roundedCorners val="1"/>
+  <c:style val="2"/>
   <c:chart>
     <c:autoTitleDeleted val="1"/>
     <c:plotArea>
+      <c:layout/>
       <c:barChart>
         <c:barDir val="bar"/>
         <c:grouping val="clustered"/>
@@ -312,46 +386,110 @@
               <a:srgbClr val="7F7F7F"/>
             </a:solidFill>
           </c:spPr>
+          <c:invertIfNegative val="1"/>
           <c:dPt>
             <c:idx val="0"/>
-            <c:spPr>
-              <a:solidFill>
-                <a:srgbClr val="7F7F7F"/>
-              </a:solidFill>
-            </c:spPr>
+            <c:invertIfNegative val="1"/>
+            <c:bubble3D val="0"/>
+            <c:extLst>
+              <c:ext xmlns:c16="http://schemas.microsoft.com/office/drawing/2014/chart" uri="{C3380CC4-5D6E-409C-BE32-E72D297353CC}">
+                <c16:uniqueId val="{00000001-D37C-46BB-B8DA-F2A14EB1E5F8}"/>
+              </c:ext>
+            </c:extLst>
           </c:dPt>
           <c:dPt>
             <c:idx val="1"/>
-            <c:spPr>
-              <a:solidFill>
-                <a:srgbClr val="7F7F7F"/>
-              </a:solidFill>
-            </c:spPr>
+            <c:invertIfNegative val="1"/>
+            <c:bubble3D val="0"/>
+            <c:extLst>
+              <c:ext xmlns:c16="http://schemas.microsoft.com/office/drawing/2014/chart" uri="{C3380CC4-5D6E-409C-BE32-E72D297353CC}">
+                <c16:uniqueId val="{00000003-D37C-46BB-B8DA-F2A14EB1E5F8}"/>
+              </c:ext>
+            </c:extLst>
           </c:dPt>
           <c:dPt>
             <c:idx val="2"/>
+            <c:invertIfNegative val="1"/>
+            <c:bubble3D val="0"/>
             <c:spPr>
               <a:solidFill>
                 <a:srgbClr val="2E5BA8"/>
               </a:solidFill>
             </c:spPr>
+            <c:extLst>
+              <c:ext xmlns:c16="http://schemas.microsoft.com/office/drawing/2014/chart" uri="{C3380CC4-5D6E-409C-BE32-E72D297353CC}">
+                <c16:uniqueId val="{00000005-D37C-46BB-B8DA-F2A14EB1E5F8}"/>
+              </c:ext>
+            </c:extLst>
           </c:dPt>
           <c:dPt>
             <c:idx val="3"/>
+            <c:invertIfNegative val="1"/>
+            <c:bubble3D val="0"/>
             <c:spPr>
               <a:solidFill>
                 <a:srgbClr val="2E5BA8"/>
               </a:solidFill>
             </c:spPr>
+            <c:extLst>
+              <c:ext xmlns:c16="http://schemas.microsoft.com/office/drawing/2014/chart" uri="{C3380CC4-5D6E-409C-BE32-E72D297353CC}">
+                <c16:uniqueId val="{00000007-D37C-46BB-B8DA-F2A14EB1E5F8}"/>
+              </c:ext>
+            </c:extLst>
           </c:dPt>
           <c:dPt>
             <c:idx val="4"/>
+            <c:invertIfNegative val="1"/>
+            <c:bubble3D val="0"/>
             <c:spPr>
               <a:solidFill>
                 <a:srgbClr val="1E9E5A"/>
               </a:solidFill>
             </c:spPr>
+            <c:extLst>
+              <c:ext xmlns:c16="http://schemas.microsoft.com/office/drawing/2014/chart" uri="{C3380CC4-5D6E-409C-BE32-E72D297353CC}">
+                <c16:uniqueId val="{00000009-D37C-46BB-B8DA-F2A14EB1E5F8}"/>
+              </c:ext>
+            </c:extLst>
           </c:dPt>
+          <c:dLbls>
+            <c:numFmt formatCode="0.0" sourceLinked="0"/>
+            <c:spPr>
+              <a:noFill/>
+              <a:ln>
+                <a:noFill/>
+              </a:ln>
+              <a:effectLst/>
+            </c:spPr>
+            <c:txPr>
+              <a:bodyPr/>
+              <a:lstStyle/>
+              <a:p>
+                <a:pPr>
+                  <a:defRPr sz="900" b="1">
+                    <a:solidFill>
+                      <a:srgbClr val="202020"/>
+                    </a:solidFill>
+                    <a:latin typeface="맑은 고딕"/>
+                  </a:defRPr>
+                </a:pPr>
+                <a:endParaRPr lang="ko-KR"/>
+              </a:p>
+            </c:txPr>
+            <c:dLblPos val="outEnd"/>
+            <c:showLegendKey val="0"/>
+            <c:showVal val="1"/>
+            <c:showCatName val="0"/>
+            <c:showSerName val="0"/>
+            <c:showPercent val="0"/>
+            <c:showBubbleSize val="0"/>
+            <c:showLeaderLines val="0"/>
+            <c:extLst>
+              <c:ext xmlns:c15="http://schemas.microsoft.com/office/drawing/2012/chart" uri="{CE6537A1-D6FC-4f65-9D91-7224C49458BB}">
+                <c15:showLeaderLines val="0"/>
+              </c:ext>
+            </c:extLst>
+          </c:dLbls>
           <c:cat>
             <c:strRef>
               <c:f>Sheet1!$A$2:$A$6</c:f>
@@ -385,7 +523,7 @@
                   <c:v>83.5</c:v>
                 </c:pt>
                 <c:pt idx="1">
-                  <c:v>87.0</c:v>
+                  <c:v>87</c:v>
                 </c:pt>
                 <c:pt idx="2">
                   <c:v>89.1</c:v>
@@ -399,23 +537,22 @@
               </c:numCache>
             </c:numRef>
           </c:val>
+          <c:extLst>
+            <c:ext xmlns:c14="http://schemas.microsoft.com/office/drawing/2007/8/2/chart" uri="{6F2FDCE9-48DA-4B69-8628-5D25D57E5C99}">
+              <c14:invertSolidFillFmt>
+                <c14:spPr xmlns:c14="http://schemas.microsoft.com/office/drawing/2007/8/2/chart">
+                  <a:solidFill>
+                    <a:srgbClr val="FFFFFF"/>
+                  </a:solidFill>
+                </c14:spPr>
+              </c14:invertSolidFillFmt>
+            </c:ext>
+            <c:ext xmlns:c16="http://schemas.microsoft.com/office/drawing/2014/chart" uri="{C3380CC4-5D6E-409C-BE32-E72D297353CC}">
+              <c16:uniqueId val="{0000000A-D37C-46BB-B8DA-F2A14EB1E5F8}"/>
+            </c:ext>
+          </c:extLst>
         </c:ser>
         <c:dLbls>
-          <c:numFmt formatCode="0.0" sourceLinked="0"/>
-          <c:txPr>
-            <a:bodyPr/>
-            <a:lstStyle/>
-            <a:p>
-              <a:pPr>
-                <a:defRPr sz="900" b="1">
-                  <a:solidFill>
-                    <a:srgbClr val="202020"/>
-                  </a:solidFill>
-                  <a:latin typeface="맑은 고딕"/>
-                </a:defRPr>
-              </a:pPr>
-            </a:p>
-          </c:txPr>
           <c:dLblPos val="outEnd"/>
           <c:showLegendKey val="0"/>
           <c:showVal val="1"/>
@@ -423,7 +560,6 @@
           <c:showSerName val="0"/>
           <c:showPercent val="0"/>
           <c:showBubbleSize val="0"/>
-          <c:showLeaderLines val="1"/>
         </c:dLbls>
         <c:gapWidth val="55"/>
         <c:axId val="-2068027336"/>
@@ -436,6 +572,7 @@
         </c:scaling>
         <c:delete val="0"/>
         <c:axPos val="l"/>
+        <c:numFmt formatCode="General" sourceLinked="0"/>
         <c:majorTickMark val="none"/>
         <c:minorTickMark val="none"/>
         <c:tickLblPos val="nextTo"/>
@@ -455,6 +592,7 @@
                 <a:latin typeface="맑은 고딕"/>
               </a:defRPr>
             </a:pPr>
+            <a:endParaRPr lang="ko-KR"/>
           </a:p>
         </c:txPr>
         <c:crossAx val="-2113994440"/>
@@ -466,22 +604,23 @@
       </c:catAx>
       <c:valAx>
         <c:axId val="-2113994440"/>
-        <c:scaling/>
-        <c:delete/>
+        <c:scaling>
+          <c:orientation val="minMax"/>
+        </c:scaling>
+        <c:delete val="1"/>
         <c:axPos val="b"/>
+        <c:numFmt formatCode="General" sourceLinked="1"/>
         <c:majorTickMark val="none"/>
         <c:minorTickMark val="none"/>
         <c:tickLblPos val="nextTo"/>
-        <c:spPr>
-          <a:ln>
-            <a:noFill/>
-          </a:ln>
-        </c:spPr>
         <c:crossAx val="-2068027336"/>
         <c:crosses val="autoZero"/>
+        <c:crossBetween val="between"/>
       </c:valAx>
     </c:plotArea>
+    <c:plotVisOnly val="1"/>
     <c:dispBlanksAs val="gap"/>
+    <c:showDLblsOverMax val="1"/>
   </c:chart>
   <c:txPr>
     <a:bodyPr/>
@@ -537,10 +676,9 @@
           <a:lstStyle/>
           <a:p>
             <a:r>
-              <a:rPr lang="en-US" smtClean="0"/>
+              <a:rPr lang="en-US"/>
               <a:t>Click to edit Master title style</a:t>
             </a:r>
-            <a:endParaRPr lang="en-US"/>
           </a:p>
         </p:txBody>
       </p:sp>
@@ -656,10 +794,9 @@
           </a:lstStyle>
           <a:p>
             <a:r>
-              <a:rPr lang="en-US" smtClean="0"/>
+              <a:rPr lang="en-US"/>
               <a:t>Click to edit Master subtitle style</a:t>
             </a:r>
-            <a:endParaRPr lang="en-US"/>
           </a:p>
         </p:txBody>
       </p:sp>
@@ -680,7 +817,7 @@
           <a:p>
             <a:fld id="{5BCAD085-E8A6-8845-BD4E-CB4CCA059FC4}" type="datetimeFigureOut">
               <a:rPr lang="en-US" smtClean="0"/>
-              <a:t>1/27/13</a:t>
+              <a:t>6/30/2026</a:t>
             </a:fld>
             <a:endParaRPr lang="en-US"/>
           </a:p>
@@ -774,10 +911,9 @@
           <a:lstStyle/>
           <a:p>
             <a:r>
-              <a:rPr lang="en-US" smtClean="0"/>
+              <a:rPr lang="en-US"/>
               <a:t>Click to edit Master title style</a:t>
             </a:r>
-            <a:endParaRPr lang="en-US"/>
           </a:p>
         </p:txBody>
       </p:sp>
@@ -798,38 +934,37 @@
           <a:p>
             <a:pPr lvl="0"/>
             <a:r>
-              <a:rPr lang="en-US" smtClean="0"/>
+              <a:rPr lang="en-US"/>
               <a:t>Click to edit Master text styles</a:t>
             </a:r>
           </a:p>
           <a:p>
             <a:pPr lvl="1"/>
             <a:r>
-              <a:rPr lang="en-US" smtClean="0"/>
+              <a:rPr lang="en-US"/>
               <a:t>Second level</a:t>
             </a:r>
           </a:p>
           <a:p>
             <a:pPr lvl="2"/>
             <a:r>
-              <a:rPr lang="en-US" smtClean="0"/>
+              <a:rPr lang="en-US"/>
               <a:t>Third level</a:t>
             </a:r>
           </a:p>
           <a:p>
             <a:pPr lvl="3"/>
             <a:r>
-              <a:rPr lang="en-US" smtClean="0"/>
+              <a:rPr lang="en-US"/>
               <a:t>Fourth level</a:t>
             </a:r>
           </a:p>
           <a:p>
             <a:pPr lvl="4"/>
             <a:r>
-              <a:rPr lang="en-US" smtClean="0"/>
+              <a:rPr lang="en-US"/>
               <a:t>Fifth level</a:t>
             </a:r>
-            <a:endParaRPr lang="en-US"/>
           </a:p>
         </p:txBody>
       </p:sp>
@@ -850,7 +985,7 @@
           <a:p>
             <a:fld id="{5BCAD085-E8A6-8845-BD4E-CB4CCA059FC4}" type="datetimeFigureOut">
               <a:rPr lang="en-US" smtClean="0"/>
-              <a:t>1/27/13</a:t>
+              <a:t>6/30/2026</a:t>
             </a:fld>
             <a:endParaRPr lang="en-US"/>
           </a:p>
@@ -949,10 +1084,9 @@
           <a:lstStyle/>
           <a:p>
             <a:r>
-              <a:rPr lang="en-US" smtClean="0"/>
+              <a:rPr lang="en-US"/>
               <a:t>Click to edit Master title style</a:t>
             </a:r>
-            <a:endParaRPr lang="en-US"/>
           </a:p>
         </p:txBody>
       </p:sp>
@@ -978,38 +1112,37 @@
           <a:p>
             <a:pPr lvl="0"/>
             <a:r>
-              <a:rPr lang="en-US" smtClean="0"/>
+              <a:rPr lang="en-US"/>
               <a:t>Click to edit Master text styles</a:t>
             </a:r>
           </a:p>
           <a:p>
             <a:pPr lvl="1"/>
             <a:r>
-              <a:rPr lang="en-US" smtClean="0"/>
+              <a:rPr lang="en-US"/>
               <a:t>Second level</a:t>
             </a:r>
           </a:p>
           <a:p>
             <a:pPr lvl="2"/>
             <a:r>
-              <a:rPr lang="en-US" smtClean="0"/>
+              <a:rPr lang="en-US"/>
               <a:t>Third level</a:t>
             </a:r>
           </a:p>
           <a:p>
             <a:pPr lvl="3"/>
             <a:r>
-              <a:rPr lang="en-US" smtClean="0"/>
+              <a:rPr lang="en-US"/>
               <a:t>Fourth level</a:t>
             </a:r>
           </a:p>
           <a:p>
             <a:pPr lvl="4"/>
             <a:r>
-              <a:rPr lang="en-US" smtClean="0"/>
+              <a:rPr lang="en-US"/>
               <a:t>Fifth level</a:t>
             </a:r>
-            <a:endParaRPr lang="en-US"/>
           </a:p>
         </p:txBody>
       </p:sp>
@@ -1030,7 +1163,7 @@
           <a:p>
             <a:fld id="{5BCAD085-E8A6-8845-BD4E-CB4CCA059FC4}" type="datetimeFigureOut">
               <a:rPr lang="en-US" smtClean="0"/>
-              <a:t>1/27/13</a:t>
+              <a:t>6/30/2026</a:t>
             </a:fld>
             <a:endParaRPr lang="en-US"/>
           </a:p>
@@ -1124,10 +1257,9 @@
           <a:lstStyle/>
           <a:p>
             <a:r>
-              <a:rPr lang="en-US" smtClean="0"/>
+              <a:rPr lang="en-US"/>
               <a:t>Click to edit Master title style</a:t>
             </a:r>
-            <a:endParaRPr lang="en-US"/>
           </a:p>
         </p:txBody>
       </p:sp>
@@ -1148,38 +1280,37 @@
           <a:p>
             <a:pPr lvl="0"/>
             <a:r>
-              <a:rPr lang="en-US" smtClean="0"/>
+              <a:rPr lang="en-US"/>
               <a:t>Click to edit Master text styles</a:t>
             </a:r>
           </a:p>
           <a:p>
             <a:pPr lvl="1"/>
             <a:r>
-              <a:rPr lang="en-US" smtClean="0"/>
+              <a:rPr lang="en-US"/>
               <a:t>Second level</a:t>
             </a:r>
           </a:p>
           <a:p>
             <a:pPr lvl="2"/>
             <a:r>
-              <a:rPr lang="en-US" smtClean="0"/>
+              <a:rPr lang="en-US"/>
               <a:t>Third level</a:t>
             </a:r>
           </a:p>
           <a:p>
             <a:pPr lvl="3"/>
             <a:r>
-              <a:rPr lang="en-US" smtClean="0"/>
+              <a:rPr lang="en-US"/>
               <a:t>Fourth level</a:t>
             </a:r>
           </a:p>
           <a:p>
             <a:pPr lvl="4"/>
             <a:r>
-              <a:rPr lang="en-US" smtClean="0"/>
+              <a:rPr lang="en-US"/>
               <a:t>Fifth level</a:t>
             </a:r>
-            <a:endParaRPr lang="en-US"/>
           </a:p>
         </p:txBody>
       </p:sp>
@@ -1200,7 +1331,7 @@
           <a:p>
             <a:fld id="{5BCAD085-E8A6-8845-BD4E-CB4CCA059FC4}" type="datetimeFigureOut">
               <a:rPr lang="en-US" smtClean="0"/>
-              <a:t>1/27/13</a:t>
+              <a:t>6/30/2026</a:t>
             </a:fld>
             <a:endParaRPr lang="en-US"/>
           </a:p>
@@ -1303,10 +1434,9 @@
           </a:lstStyle>
           <a:p>
             <a:r>
-              <a:rPr lang="en-US" smtClean="0"/>
+              <a:rPr lang="en-US"/>
               <a:t>Click to edit Master title style</a:t>
             </a:r>
-            <a:endParaRPr lang="en-US"/>
           </a:p>
         </p:txBody>
       </p:sp>
@@ -1423,7 +1553,7 @@
           <a:p>
             <a:pPr lvl="0"/>
             <a:r>
-              <a:rPr lang="en-US" smtClean="0"/>
+              <a:rPr lang="en-US"/>
               <a:t>Click to edit Master text styles</a:t>
             </a:r>
           </a:p>
@@ -1446,7 +1576,7 @@
           <a:p>
             <a:fld id="{5BCAD085-E8A6-8845-BD4E-CB4CCA059FC4}" type="datetimeFigureOut">
               <a:rPr lang="en-US" smtClean="0"/>
-              <a:t>1/27/13</a:t>
+              <a:t>6/30/2026</a:t>
             </a:fld>
             <a:endParaRPr lang="en-US"/>
           </a:p>
@@ -1540,10 +1670,9 @@
           <a:lstStyle/>
           <a:p>
             <a:r>
-              <a:rPr lang="en-US" smtClean="0"/>
+              <a:rPr lang="en-US"/>
               <a:t>Click to edit Master title style</a:t>
             </a:r>
-            <a:endParaRPr lang="en-US"/>
           </a:p>
         </p:txBody>
       </p:sp>
@@ -1597,38 +1726,37 @@
           <a:p>
             <a:pPr lvl="0"/>
             <a:r>
-              <a:rPr lang="en-US" smtClean="0"/>
+              <a:rPr lang="en-US"/>
               <a:t>Click to edit Master text styles</a:t>
             </a:r>
           </a:p>
           <a:p>
             <a:pPr lvl="1"/>
             <a:r>
-              <a:rPr lang="en-US" smtClean="0"/>
+              <a:rPr lang="en-US"/>
               <a:t>Second level</a:t>
             </a:r>
           </a:p>
           <a:p>
             <a:pPr lvl="2"/>
             <a:r>
-              <a:rPr lang="en-US" smtClean="0"/>
+              <a:rPr lang="en-US"/>
               <a:t>Third level</a:t>
             </a:r>
           </a:p>
           <a:p>
             <a:pPr lvl="3"/>
             <a:r>
-              <a:rPr lang="en-US" smtClean="0"/>
+              <a:rPr lang="en-US"/>
               <a:t>Fourth level</a:t>
             </a:r>
           </a:p>
           <a:p>
             <a:pPr lvl="4"/>
             <a:r>
-              <a:rPr lang="en-US" smtClean="0"/>
+              <a:rPr lang="en-US"/>
               <a:t>Fifth level</a:t>
             </a:r>
-            <a:endParaRPr lang="en-US"/>
           </a:p>
         </p:txBody>
       </p:sp>
@@ -1682,38 +1810,37 @@
           <a:p>
             <a:pPr lvl="0"/>
             <a:r>
-              <a:rPr lang="en-US" smtClean="0"/>
+              <a:rPr lang="en-US"/>
               <a:t>Click to edit Master text styles</a:t>
             </a:r>
           </a:p>
           <a:p>
             <a:pPr lvl="1"/>
             <a:r>
-              <a:rPr lang="en-US" smtClean="0"/>
+              <a:rPr lang="en-US"/>
               <a:t>Second level</a:t>
             </a:r>
           </a:p>
           <a:p>
             <a:pPr lvl="2"/>
             <a:r>
-              <a:rPr lang="en-US" smtClean="0"/>
+              <a:rPr lang="en-US"/>
               <a:t>Third level</a:t>
             </a:r>
           </a:p>
           <a:p>
             <a:pPr lvl="3"/>
             <a:r>
-              <a:rPr lang="en-US" smtClean="0"/>
+              <a:rPr lang="en-US"/>
               <a:t>Fourth level</a:t>
             </a:r>
           </a:p>
           <a:p>
             <a:pPr lvl="4"/>
             <a:r>
-              <a:rPr lang="en-US" smtClean="0"/>
+              <a:rPr lang="en-US"/>
               <a:t>Fifth level</a:t>
             </a:r>
-            <a:endParaRPr lang="en-US"/>
           </a:p>
         </p:txBody>
       </p:sp>
@@ -1734,7 +1861,7 @@
           <a:p>
             <a:fld id="{5BCAD085-E8A6-8845-BD4E-CB4CCA059FC4}" type="datetimeFigureOut">
               <a:rPr lang="en-US" smtClean="0"/>
-              <a:t>1/27/13</a:t>
+              <a:t>6/30/2026</a:t>
             </a:fld>
             <a:endParaRPr lang="en-US"/>
           </a:p>
@@ -1832,10 +1959,9 @@
           </a:lstStyle>
           <a:p>
             <a:r>
-              <a:rPr lang="en-US" smtClean="0"/>
+              <a:rPr lang="en-US"/>
               <a:t>Click to edit Master title style</a:t>
             </a:r>
-            <a:endParaRPr lang="en-US"/>
           </a:p>
         </p:txBody>
       </p:sp>
@@ -1898,7 +2024,7 @@
           <a:p>
             <a:pPr lvl="0"/>
             <a:r>
-              <a:rPr lang="en-US" smtClean="0"/>
+              <a:rPr lang="en-US"/>
               <a:t>Click to edit Master text styles</a:t>
             </a:r>
           </a:p>
@@ -1954,38 +2080,37 @@
           <a:p>
             <a:pPr lvl="0"/>
             <a:r>
-              <a:rPr lang="en-US" smtClean="0"/>
+              <a:rPr lang="en-US"/>
               <a:t>Click to edit Master text styles</a:t>
             </a:r>
           </a:p>
           <a:p>
             <a:pPr lvl="1"/>
             <a:r>
-              <a:rPr lang="en-US" smtClean="0"/>
+              <a:rPr lang="en-US"/>
               <a:t>Second level</a:t>
             </a:r>
           </a:p>
           <a:p>
             <a:pPr lvl="2"/>
             <a:r>
-              <a:rPr lang="en-US" smtClean="0"/>
+              <a:rPr lang="en-US"/>
               <a:t>Third level</a:t>
             </a:r>
           </a:p>
           <a:p>
             <a:pPr lvl="3"/>
             <a:r>
-              <a:rPr lang="en-US" smtClean="0"/>
+              <a:rPr lang="en-US"/>
               <a:t>Fourth level</a:t>
             </a:r>
           </a:p>
           <a:p>
             <a:pPr lvl="4"/>
             <a:r>
-              <a:rPr lang="en-US" smtClean="0"/>
+              <a:rPr lang="en-US"/>
               <a:t>Fifth level</a:t>
             </a:r>
-            <a:endParaRPr lang="en-US"/>
           </a:p>
         </p:txBody>
       </p:sp>
@@ -2048,7 +2173,7 @@
           <a:p>
             <a:pPr lvl="0"/>
             <a:r>
-              <a:rPr lang="en-US" smtClean="0"/>
+              <a:rPr lang="en-US"/>
               <a:t>Click to edit Master text styles</a:t>
             </a:r>
           </a:p>
@@ -2104,38 +2229,37 @@
           <a:p>
             <a:pPr lvl="0"/>
             <a:r>
-              <a:rPr lang="en-US" smtClean="0"/>
+              <a:rPr lang="en-US"/>
               <a:t>Click to edit Master text styles</a:t>
             </a:r>
           </a:p>
           <a:p>
             <a:pPr lvl="1"/>
             <a:r>
-              <a:rPr lang="en-US" smtClean="0"/>
+              <a:rPr lang="en-US"/>
               <a:t>Second level</a:t>
             </a:r>
           </a:p>
           <a:p>
             <a:pPr lvl="2"/>
             <a:r>
-              <a:rPr lang="en-US" smtClean="0"/>
+              <a:rPr lang="en-US"/>
               <a:t>Third level</a:t>
             </a:r>
           </a:p>
           <a:p>
             <a:pPr lvl="3"/>
             <a:r>
-              <a:rPr lang="en-US" smtClean="0"/>
+              <a:rPr lang="en-US"/>
               <a:t>Fourth level</a:t>
             </a:r>
           </a:p>
           <a:p>
             <a:pPr lvl="4"/>
             <a:r>
-              <a:rPr lang="en-US" smtClean="0"/>
+              <a:rPr lang="en-US"/>
               <a:t>Fifth level</a:t>
             </a:r>
-            <a:endParaRPr lang="en-US"/>
           </a:p>
         </p:txBody>
       </p:sp>
@@ -2156,7 +2280,7 @@
           <a:p>
             <a:fld id="{5BCAD085-E8A6-8845-BD4E-CB4CCA059FC4}" type="datetimeFigureOut">
               <a:rPr lang="en-US" smtClean="0"/>
-              <a:t>1/27/13</a:t>
+              <a:t>6/30/2026</a:t>
             </a:fld>
             <a:endParaRPr lang="en-US"/>
           </a:p>
@@ -2250,10 +2374,9 @@
           <a:lstStyle/>
           <a:p>
             <a:r>
-              <a:rPr lang="en-US" smtClean="0"/>
+              <a:rPr lang="en-US"/>
               <a:t>Click to edit Master title style</a:t>
             </a:r>
-            <a:endParaRPr lang="en-US"/>
           </a:p>
         </p:txBody>
       </p:sp>
@@ -2274,7 +2397,7 @@
           <a:p>
             <a:fld id="{5BCAD085-E8A6-8845-BD4E-CB4CCA059FC4}" type="datetimeFigureOut">
               <a:rPr lang="en-US" smtClean="0"/>
-              <a:t>1/27/13</a:t>
+              <a:t>6/30/2026</a:t>
             </a:fld>
             <a:endParaRPr lang="en-US"/>
           </a:p>
@@ -2369,7 +2492,7 @@
           <a:p>
             <a:fld id="{5BCAD085-E8A6-8845-BD4E-CB4CCA059FC4}" type="datetimeFigureOut">
               <a:rPr lang="en-US" smtClean="0"/>
-              <a:t>1/27/13</a:t>
+              <a:t>6/30/2026</a:t>
             </a:fld>
             <a:endParaRPr lang="en-US"/>
           </a:p>
@@ -2472,10 +2595,9 @@
           </a:lstStyle>
           <a:p>
             <a:r>
-              <a:rPr lang="en-US" smtClean="0"/>
+              <a:rPr lang="en-US"/>
               <a:t>Click to edit Master title style</a:t>
             </a:r>
-            <a:endParaRPr lang="en-US"/>
           </a:p>
         </p:txBody>
       </p:sp>
@@ -2529,38 +2651,37 @@
           <a:p>
             <a:pPr lvl="0"/>
             <a:r>
-              <a:rPr lang="en-US" smtClean="0"/>
+              <a:rPr lang="en-US"/>
               <a:t>Click to edit Master text styles</a:t>
             </a:r>
           </a:p>
           <a:p>
             <a:pPr lvl="1"/>
             <a:r>
-              <a:rPr lang="en-US" smtClean="0"/>
+              <a:rPr lang="en-US"/>
               <a:t>Second level</a:t>
             </a:r>
           </a:p>
           <a:p>
             <a:pPr lvl="2"/>
             <a:r>
-              <a:rPr lang="en-US" smtClean="0"/>
+              <a:rPr lang="en-US"/>
               <a:t>Third level</a:t>
             </a:r>
           </a:p>
           <a:p>
             <a:pPr lvl="3"/>
             <a:r>
-              <a:rPr lang="en-US" smtClean="0"/>
+              <a:rPr lang="en-US"/>
               <a:t>Fourth level</a:t>
             </a:r>
           </a:p>
           <a:p>
             <a:pPr lvl="4"/>
             <a:r>
-              <a:rPr lang="en-US" smtClean="0"/>
+              <a:rPr lang="en-US"/>
               <a:t>Fifth level</a:t>
             </a:r>
-            <a:endParaRPr lang="en-US"/>
           </a:p>
         </p:txBody>
       </p:sp>
@@ -2623,7 +2744,7 @@
           <a:p>
             <a:pPr lvl="0"/>
             <a:r>
-              <a:rPr lang="en-US" smtClean="0"/>
+              <a:rPr lang="en-US"/>
               <a:t>Click to edit Master text styles</a:t>
             </a:r>
           </a:p>
@@ -2646,7 +2767,7 @@
           <a:p>
             <a:fld id="{5BCAD085-E8A6-8845-BD4E-CB4CCA059FC4}" type="datetimeFigureOut">
               <a:rPr lang="en-US" smtClean="0"/>
-              <a:t>1/27/13</a:t>
+              <a:t>6/30/2026</a:t>
             </a:fld>
             <a:endParaRPr lang="en-US"/>
           </a:p>
@@ -2749,10 +2870,9 @@
           </a:lstStyle>
           <a:p>
             <a:r>
-              <a:rPr lang="en-US" smtClean="0"/>
+              <a:rPr lang="en-US"/>
               <a:t>Click to edit Master title style</a:t>
             </a:r>
-            <a:endParaRPr lang="en-US"/>
           </a:p>
         </p:txBody>
       </p:sp>
@@ -2876,7 +2996,7 @@
           <a:p>
             <a:pPr lvl="0"/>
             <a:r>
-              <a:rPr lang="en-US" smtClean="0"/>
+              <a:rPr lang="en-US"/>
               <a:t>Click to edit Master text styles</a:t>
             </a:r>
           </a:p>
@@ -2899,7 +3019,7 @@
           <a:p>
             <a:fld id="{5BCAD085-E8A6-8845-BD4E-CB4CCA059FC4}" type="datetimeFigureOut">
               <a:rPr lang="en-US" smtClean="0"/>
-              <a:t>1/27/13</a:t>
+              <a:t>6/30/2026</a:t>
             </a:fld>
             <a:endParaRPr lang="en-US"/>
           </a:p>
@@ -3008,10 +3128,9 @@
           <a:lstStyle/>
           <a:p>
             <a:r>
-              <a:rPr lang="en-US" smtClean="0"/>
+              <a:rPr lang="en-US"/>
               <a:t>Click to edit Master title style</a:t>
             </a:r>
-            <a:endParaRPr lang="en-US"/>
           </a:p>
         </p:txBody>
       </p:sp>
@@ -3042,38 +3161,37 @@
           <a:p>
             <a:pPr lvl="0"/>
             <a:r>
-              <a:rPr lang="en-US" smtClean="0"/>
+              <a:rPr lang="en-US"/>
               <a:t>Click to edit Master text styles</a:t>
             </a:r>
           </a:p>
           <a:p>
             <a:pPr lvl="1"/>
             <a:r>
-              <a:rPr lang="en-US" smtClean="0"/>
+              <a:rPr lang="en-US"/>
               <a:t>Second level</a:t>
             </a:r>
           </a:p>
           <a:p>
             <a:pPr lvl="2"/>
             <a:r>
-              <a:rPr lang="en-US" smtClean="0"/>
+              <a:rPr lang="en-US"/>
               <a:t>Third level</a:t>
             </a:r>
           </a:p>
           <a:p>
             <a:pPr lvl="3"/>
             <a:r>
-              <a:rPr lang="en-US" smtClean="0"/>
+              <a:rPr lang="en-US"/>
               <a:t>Fourth level</a:t>
             </a:r>
           </a:p>
           <a:p>
             <a:pPr lvl="4"/>
             <a:r>
-              <a:rPr lang="en-US" smtClean="0"/>
+              <a:rPr lang="en-US"/>
               <a:t>Fifth level</a:t>
             </a:r>
-            <a:endParaRPr lang="en-US"/>
           </a:p>
         </p:txBody>
       </p:sp>
@@ -3112,7 +3230,7 @@
           <a:p>
             <a:fld id="{5BCAD085-E8A6-8845-BD4E-CB4CCA059FC4}" type="datetimeFigureOut">
               <a:rPr lang="en-US" smtClean="0"/>
-              <a:t>1/27/13</a:t>
+              <a:t>6/30/2026</a:t>
             </a:fld>
             <a:endParaRPr lang="en-US"/>
           </a:p>
@@ -3471,7 +3589,7 @@
 </file>
 
 <file path=ppt/slides/slide1.xml><?xml version="1.0" encoding="utf-8"?>
-<p:sld xmlns:a="http://schemas.openxmlformats.org/drawingml/2006/main" xmlns:p="http://schemas.openxmlformats.org/presentationml/2006/main" xmlns:r="http://schemas.openxmlformats.org/officeDocument/2006/relationships">
+<p:sld xmlns:a="http://schemas.openxmlformats.org/drawingml/2006/main" xmlns:r="http://schemas.openxmlformats.org/officeDocument/2006/relationships" xmlns:p="http://schemas.openxmlformats.org/presentationml/2006/main">
   <p:cSld>
     <p:spTree>
       <p:nvGrpSpPr>
@@ -3479,7 +3597,14 @@
         <p:cNvGrpSpPr/>
         <p:nvPr/>
       </p:nvGrpSpPr>
-      <p:grpSpPr/>
+      <p:grpSpPr>
+        <a:xfrm>
+          <a:off x="0" y="0"/>
+          <a:ext cx="0" cy="0"/>
+          <a:chOff x="0" y="0"/>
+          <a:chExt cx="0" cy="0"/>
+        </a:xfrm>
+      </p:grpSpPr>
       <p:sp>
         <p:nvSpPr>
           <p:cNvPr id="2" name="TextBox 1"/>
@@ -3497,7 +3622,7 @@
           <a:noFill/>
         </p:spPr>
         <p:txBody>
-          <a:bodyPr wrap="square" anchor="ctr" lIns="25400" rIns="25400" tIns="12700" bIns="12700">
+          <a:bodyPr wrap="square" lIns="25400" tIns="12700" rIns="25400" bIns="12700" anchor="ctr">
             <a:spAutoFit/>
           </a:bodyPr>
           <a:lstStyle/>
@@ -3587,6 +3712,7 @@
           <a:lstStyle/>
           <a:p>
             <a:pPr algn="ctr"/>
+            <a:endParaRPr/>
           </a:p>
         </p:txBody>
       </p:sp>
@@ -3629,7 +3755,7 @@
           </a:fontRef>
         </p:style>
         <p:txBody>
-          <a:bodyPr rtlCol="0" anchor="ctr" wrap="none" lIns="12700" rIns="12700" tIns="0" bIns="0"/>
+          <a:bodyPr wrap="none" lIns="12700" tIns="0" rIns="12700" bIns="0" rtlCol="0" anchor="ctr"/>
           <a:lstStyle/>
           <a:p>
             <a:pPr algn="ctr"/>
@@ -3685,7 +3811,7 @@
           </a:fontRef>
         </p:style>
         <p:txBody>
-          <a:bodyPr rtlCol="0" anchor="ctr" wrap="none" lIns="12700" rIns="12700" tIns="0" bIns="0"/>
+          <a:bodyPr wrap="none" lIns="12700" tIns="0" rIns="12700" bIns="0" rtlCol="0" anchor="ctr"/>
           <a:lstStyle/>
           <a:p>
             <a:pPr algn="ctr"/>
@@ -3741,7 +3867,7 @@
           </a:fontRef>
         </p:style>
         <p:txBody>
-          <a:bodyPr rtlCol="0" anchor="ctr" wrap="none" lIns="12700" rIns="12700" tIns="0" bIns="0"/>
+          <a:bodyPr wrap="none" lIns="12700" tIns="0" rIns="12700" bIns="0" rtlCol="0" anchor="ctr"/>
           <a:lstStyle/>
           <a:p>
             <a:pPr algn="ctr"/>
@@ -3797,7 +3923,7 @@
           </a:fontRef>
         </p:style>
         <p:txBody>
-          <a:bodyPr rtlCol="0" anchor="ctr" wrap="none" lIns="12700" rIns="12700" tIns="0" bIns="0"/>
+          <a:bodyPr wrap="none" lIns="12700" tIns="0" rIns="12700" bIns="0" rtlCol="0" anchor="ctr"/>
           <a:lstStyle/>
           <a:p>
             <a:pPr algn="ctr"/>
@@ -3853,7 +3979,7 @@
           </a:fontRef>
         </p:style>
         <p:txBody>
-          <a:bodyPr rtlCol="0" anchor="ctr" wrap="none" lIns="12700" rIns="12700" tIns="0" bIns="0"/>
+          <a:bodyPr wrap="none" lIns="12700" tIns="0" rIns="12700" bIns="0" rtlCol="0" anchor="ctr"/>
           <a:lstStyle/>
           <a:p>
             <a:pPr algn="ctr"/>
@@ -3915,6 +4041,7 @@
           <a:lstStyle/>
           <a:p>
             <a:pPr algn="ctr"/>
+            <a:endParaRPr/>
           </a:p>
         </p:txBody>
       </p:sp>
@@ -3957,7 +4084,7 @@
           </a:fontRef>
         </p:style>
         <p:txBody>
-          <a:bodyPr rtlCol="0" anchor="ctr" tIns="0" bIns="0"/>
+          <a:bodyPr tIns="0" bIns="0" rtlCol="0" anchor="ctr"/>
           <a:lstStyle/>
           <a:p>
             <a:pPr algn="ctr"/>
@@ -3991,12 +4118,12 @@
           <a:noFill/>
         </p:spPr>
         <p:txBody>
-          <a:bodyPr wrap="square" anchor="ctr" lIns="25400" rIns="25400" tIns="12700" bIns="12700">
+          <a:bodyPr wrap="square" lIns="25400" tIns="12700" rIns="25400" bIns="12700" anchor="ctr">
             <a:spAutoFit/>
           </a:bodyPr>
           <a:lstStyle/>
           <a:p>
-            <a:pPr algn="l" marL="190500" indent="-190500">
+            <a:pPr marL="190500" indent="-190500" algn="l">
               <a:lnSpc>
                 <a:spcPct val="103000"/>
               </a:lnSpc>
@@ -4030,7 +4157,7 @@
             </a:r>
           </a:p>
           <a:p>
-            <a:pPr algn="l" marL="355600" indent="-165100">
+            <a:pPr marL="355600" indent="-165100" algn="l">
               <a:lnSpc>
                 <a:spcPct val="103000"/>
               </a:lnSpc>
@@ -4074,7 +4201,7 @@
             </a:r>
           </a:p>
           <a:p>
-            <a:pPr algn="l" marL="190500" indent="-190500">
+            <a:pPr marL="190500" indent="-190500" algn="l">
               <a:lnSpc>
                 <a:spcPct val="103000"/>
               </a:lnSpc>
@@ -4108,7 +4235,7 @@
             </a:r>
           </a:p>
           <a:p>
-            <a:pPr algn="l" marL="355600" indent="-165100">
+            <a:pPr marL="355600" indent="-165100" algn="l">
               <a:lnSpc>
                 <a:spcPct val="103000"/>
               </a:lnSpc>
@@ -4209,6 +4336,7 @@
           <a:lstStyle/>
           <a:p>
             <a:pPr algn="ctr"/>
+            <a:endParaRPr/>
           </a:p>
         </p:txBody>
       </p:sp>
@@ -4229,7 +4357,7 @@
           <a:noFill/>
         </p:spPr>
         <p:txBody>
-          <a:bodyPr wrap="square" anchor="ctr" lIns="25400" rIns="25400" tIns="12700" bIns="12700">
+          <a:bodyPr wrap="square" lIns="25400" tIns="12700" rIns="25400" bIns="12700" anchor="ctr">
             <a:spAutoFit/>
           </a:bodyPr>
           <a:lstStyle/>
@@ -4303,6 +4431,7 @@
           <a:lstStyle/>
           <a:p>
             <a:pPr algn="ctr"/>
+            <a:endParaRPr/>
           </a:p>
         </p:txBody>
       </p:sp>
@@ -4323,7 +4452,7 @@
           <a:noFill/>
         </p:spPr>
         <p:txBody>
-          <a:bodyPr wrap="square" anchor="ctr" lIns="25400" rIns="25400" tIns="12700" bIns="12700">
+          <a:bodyPr wrap="square" lIns="25400" tIns="12700" rIns="25400" bIns="12700" anchor="ctr">
             <a:spAutoFit/>
           </a:bodyPr>
           <a:lstStyle/>
@@ -4397,6 +4526,7 @@
           <a:lstStyle/>
           <a:p>
             <a:pPr algn="ctr"/>
+            <a:endParaRPr/>
           </a:p>
         </p:txBody>
       </p:sp>
@@ -4417,7 +4547,7 @@
           <a:noFill/>
         </p:spPr>
         <p:txBody>
-          <a:bodyPr wrap="square" anchor="ctr" lIns="25400" rIns="25400" tIns="12700" bIns="12700">
+          <a:bodyPr wrap="square" lIns="25400" tIns="12700" rIns="25400" bIns="12700" anchor="ctr">
             <a:spAutoFit/>
           </a:bodyPr>
           <a:lstStyle/>
@@ -4491,6 +4621,7 @@
           <a:lstStyle/>
           <a:p>
             <a:pPr algn="ctr"/>
+            <a:endParaRPr/>
           </a:p>
         </p:txBody>
       </p:sp>
@@ -4511,7 +4642,7 @@
           <a:noFill/>
         </p:spPr>
         <p:txBody>
-          <a:bodyPr wrap="square" anchor="ctr" lIns="25400" rIns="25400" tIns="12700" bIns="12700">
+          <a:bodyPr wrap="square" lIns="25400" tIns="12700" rIns="25400" bIns="12700" anchor="ctr">
             <a:spAutoFit/>
           </a:bodyPr>
           <a:lstStyle/>
@@ -4585,6 +4716,7 @@
           <a:lstStyle/>
           <a:p>
             <a:pPr algn="ctr"/>
+            <a:endParaRPr/>
           </a:p>
         </p:txBody>
       </p:sp>
@@ -4605,7 +4737,7 @@
           <a:noFill/>
         </p:spPr>
         <p:txBody>
-          <a:bodyPr wrap="square" anchor="ctr" lIns="25400" rIns="25400" tIns="12700" bIns="12700">
+          <a:bodyPr wrap="square" lIns="25400" tIns="12700" rIns="25400" bIns="12700" anchor="ctr">
             <a:spAutoFit/>
           </a:bodyPr>
           <a:lstStyle/>
@@ -4679,6 +4811,7 @@
           <a:lstStyle/>
           <a:p>
             <a:pPr algn="ctr"/>
+            <a:endParaRPr/>
           </a:p>
         </p:txBody>
       </p:sp>
@@ -4699,7 +4832,7 @@
           <a:noFill/>
         </p:spPr>
         <p:txBody>
-          <a:bodyPr wrap="square" anchor="ctr" lIns="25400" rIns="25400" tIns="12700" bIns="12700">
+          <a:bodyPr wrap="square" lIns="25400" tIns="12700" rIns="25400" bIns="12700" anchor="ctr">
             <a:spAutoFit/>
           </a:bodyPr>
           <a:lstStyle/>
@@ -4773,6 +4906,7 @@
           <a:lstStyle/>
           <a:p>
             <a:pPr algn="ctr"/>
+            <a:endParaRPr/>
           </a:p>
         </p:txBody>
       </p:sp>
@@ -4793,7 +4927,7 @@
           <a:noFill/>
         </p:spPr>
         <p:txBody>
-          <a:bodyPr wrap="square" anchor="ctr" lIns="25400" rIns="25400" tIns="12700" bIns="12700">
+          <a:bodyPr wrap="square" lIns="25400" tIns="12700" rIns="25400" bIns="12700" anchor="ctr">
             <a:spAutoFit/>
           </a:bodyPr>
           <a:lstStyle/>
@@ -4867,6 +5001,7 @@
           <a:lstStyle/>
           <a:p>
             <a:pPr algn="ctr"/>
+            <a:endParaRPr/>
           </a:p>
         </p:txBody>
       </p:sp>
@@ -4887,7 +5022,7 @@
           <a:noFill/>
         </p:spPr>
         <p:txBody>
-          <a:bodyPr wrap="square" anchor="ctr" lIns="25400" rIns="25400" tIns="12700" bIns="12700">
+          <a:bodyPr wrap="square" lIns="25400" tIns="12700" rIns="25400" bIns="12700" anchor="ctr">
             <a:spAutoFit/>
           </a:bodyPr>
           <a:lstStyle/>
@@ -4961,6 +5096,7 @@
           <a:lstStyle/>
           <a:p>
             <a:pPr algn="ctr"/>
+            <a:endParaRPr/>
           </a:p>
         </p:txBody>
       </p:sp>
@@ -4981,7 +5117,7 @@
           <a:noFill/>
         </p:spPr>
         <p:txBody>
-          <a:bodyPr wrap="square" anchor="ctr" lIns="25400" rIns="25400" tIns="12700" bIns="12700">
+          <a:bodyPr wrap="square" lIns="25400" tIns="12700" rIns="25400" bIns="12700" anchor="ctr">
             <a:spAutoFit/>
           </a:bodyPr>
           <a:lstStyle/>
@@ -5055,6 +5191,7 @@
           <a:lstStyle/>
           <a:p>
             <a:pPr algn="ctr"/>
+            <a:endParaRPr/>
           </a:p>
         </p:txBody>
       </p:sp>
@@ -5075,7 +5212,7 @@
           <a:noFill/>
         </p:spPr>
         <p:txBody>
-          <a:bodyPr wrap="square" anchor="ctr" lIns="25400" rIns="25400" tIns="12700" bIns="12700">
+          <a:bodyPr wrap="square" lIns="25400" tIns="12700" rIns="25400" bIns="12700" anchor="ctr">
             <a:spAutoFit/>
           </a:bodyPr>
           <a:lstStyle/>
@@ -5149,6 +5286,7 @@
           <a:lstStyle/>
           <a:p>
             <a:pPr algn="ctr"/>
+            <a:endParaRPr/>
           </a:p>
         </p:txBody>
       </p:sp>
@@ -5169,7 +5307,7 @@
           <a:noFill/>
         </p:spPr>
         <p:txBody>
-          <a:bodyPr wrap="square" anchor="ctr" lIns="25400" rIns="25400" tIns="12700" bIns="12700">
+          <a:bodyPr wrap="square" lIns="25400" tIns="12700" rIns="25400" bIns="12700" anchor="ctr">
             <a:spAutoFit/>
           </a:bodyPr>
           <a:lstStyle/>
@@ -5243,6 +5381,7 @@
           <a:lstStyle/>
           <a:p>
             <a:pPr algn="ctr"/>
+            <a:endParaRPr/>
           </a:p>
         </p:txBody>
       </p:sp>
@@ -5263,7 +5402,7 @@
           <a:noFill/>
         </p:spPr>
         <p:txBody>
-          <a:bodyPr wrap="square" anchor="ctr" lIns="25400" rIns="25400" tIns="12700" bIns="12700">
+          <a:bodyPr wrap="square" lIns="25400" tIns="12700" rIns="25400" bIns="12700" anchor="ctr">
             <a:spAutoFit/>
           </a:bodyPr>
           <a:lstStyle/>
@@ -5337,6 +5476,7 @@
           <a:lstStyle/>
           <a:p>
             <a:pPr algn="ctr"/>
+            <a:endParaRPr/>
           </a:p>
         </p:txBody>
       </p:sp>
@@ -5357,7 +5497,7 @@
           <a:noFill/>
         </p:spPr>
         <p:txBody>
-          <a:bodyPr wrap="square" anchor="ctr" lIns="25400" rIns="25400" tIns="12700" bIns="12700">
+          <a:bodyPr wrap="square" lIns="25400" tIns="12700" rIns="25400" bIns="12700" anchor="ctr">
             <a:spAutoFit/>
           </a:bodyPr>
           <a:lstStyle/>
@@ -5431,6 +5571,7 @@
           <a:lstStyle/>
           <a:p>
             <a:pPr algn="ctr"/>
+            <a:endParaRPr/>
           </a:p>
         </p:txBody>
       </p:sp>
@@ -5451,7 +5592,7 @@
           <a:noFill/>
         </p:spPr>
         <p:txBody>
-          <a:bodyPr wrap="square" anchor="ctr" lIns="25400" rIns="25400" tIns="12700" bIns="12700">
+          <a:bodyPr wrap="square" lIns="25400" tIns="12700" rIns="25400" bIns="12700" anchor="ctr">
             <a:spAutoFit/>
           </a:bodyPr>
           <a:lstStyle/>
@@ -5525,6 +5666,7 @@
           <a:lstStyle/>
           <a:p>
             <a:pPr algn="ctr"/>
+            <a:endParaRPr/>
           </a:p>
         </p:txBody>
       </p:sp>
@@ -5545,7 +5687,7 @@
           <a:noFill/>
         </p:spPr>
         <p:txBody>
-          <a:bodyPr wrap="square" anchor="ctr" lIns="25400" rIns="25400" tIns="12700" bIns="12700">
+          <a:bodyPr wrap="square" lIns="25400" tIns="12700" rIns="25400" bIns="12700" anchor="ctr">
             <a:spAutoFit/>
           </a:bodyPr>
           <a:lstStyle/>
@@ -5619,6 +5761,7 @@
           <a:lstStyle/>
           <a:p>
             <a:pPr algn="ctr"/>
+            <a:endParaRPr/>
           </a:p>
         </p:txBody>
       </p:sp>
@@ -5639,7 +5782,7 @@
           <a:noFill/>
         </p:spPr>
         <p:txBody>
-          <a:bodyPr wrap="square" anchor="ctr" lIns="25400" rIns="25400" tIns="12700" bIns="12700">
+          <a:bodyPr wrap="square" lIns="25400" tIns="12700" rIns="25400" bIns="12700" anchor="ctr">
             <a:spAutoFit/>
           </a:bodyPr>
           <a:lstStyle/>
@@ -5713,6 +5856,7 @@
           <a:lstStyle/>
           <a:p>
             <a:pPr algn="ctr"/>
+            <a:endParaRPr/>
           </a:p>
         </p:txBody>
       </p:sp>
@@ -5733,7 +5877,7 @@
           <a:noFill/>
         </p:spPr>
         <p:txBody>
-          <a:bodyPr wrap="square" anchor="ctr" lIns="25400" rIns="25400" tIns="12700" bIns="12700">
+          <a:bodyPr wrap="square" lIns="25400" tIns="12700" rIns="25400" bIns="12700" anchor="ctr">
             <a:spAutoFit/>
           </a:bodyPr>
           <a:lstStyle/>
@@ -5807,6 +5951,7 @@
           <a:lstStyle/>
           <a:p>
             <a:pPr algn="ctr"/>
+            <a:endParaRPr/>
           </a:p>
         </p:txBody>
       </p:sp>
@@ -5827,7 +5972,7 @@
           <a:noFill/>
         </p:spPr>
         <p:txBody>
-          <a:bodyPr wrap="square" anchor="ctr" lIns="25400" rIns="25400" tIns="12700" bIns="12700">
+          <a:bodyPr wrap="square" lIns="25400" tIns="12700" rIns="25400" bIns="12700" anchor="ctr">
             <a:spAutoFit/>
           </a:bodyPr>
           <a:lstStyle/>
@@ -5901,6 +6046,7 @@
           <a:lstStyle/>
           <a:p>
             <a:pPr algn="ctr"/>
+            <a:endParaRPr/>
           </a:p>
         </p:txBody>
       </p:sp>
@@ -5921,7 +6067,7 @@
           <a:noFill/>
         </p:spPr>
         <p:txBody>
-          <a:bodyPr wrap="square" anchor="ctr" lIns="25400" rIns="25400" tIns="12700" bIns="12700">
+          <a:bodyPr wrap="square" lIns="25400" tIns="12700" rIns="25400" bIns="12700" anchor="ctr">
             <a:spAutoFit/>
           </a:bodyPr>
           <a:lstStyle/>
@@ -5995,6 +6141,7 @@
           <a:lstStyle/>
           <a:p>
             <a:pPr algn="ctr"/>
+            <a:endParaRPr/>
           </a:p>
         </p:txBody>
       </p:sp>
@@ -6015,7 +6162,7 @@
           <a:noFill/>
         </p:spPr>
         <p:txBody>
-          <a:bodyPr wrap="square" anchor="ctr" lIns="25400" rIns="25400" tIns="12700" bIns="12700">
+          <a:bodyPr wrap="square" lIns="25400" tIns="12700" rIns="25400" bIns="12700" anchor="ctr">
             <a:spAutoFit/>
           </a:bodyPr>
           <a:lstStyle/>
@@ -6089,6 +6236,7 @@
           <a:lstStyle/>
           <a:p>
             <a:pPr algn="ctr"/>
+            <a:endParaRPr/>
           </a:p>
         </p:txBody>
       </p:sp>
@@ -6109,7 +6257,7 @@
           <a:noFill/>
         </p:spPr>
         <p:txBody>
-          <a:bodyPr wrap="square" anchor="ctr" lIns="25400" rIns="25400" tIns="12700" bIns="12700">
+          <a:bodyPr wrap="square" lIns="25400" tIns="12700" rIns="25400" bIns="12700" anchor="ctr">
             <a:spAutoFit/>
           </a:bodyPr>
           <a:lstStyle/>
@@ -6183,6 +6331,7 @@
           <a:lstStyle/>
           <a:p>
             <a:pPr algn="ctr"/>
+            <a:endParaRPr/>
           </a:p>
         </p:txBody>
       </p:sp>
@@ -6203,7 +6352,7 @@
           <a:noFill/>
         </p:spPr>
         <p:txBody>
-          <a:bodyPr wrap="square" anchor="ctr" lIns="25400" rIns="25400" tIns="12700" bIns="12700">
+          <a:bodyPr wrap="square" lIns="25400" tIns="12700" rIns="25400" bIns="12700" anchor="ctr">
             <a:spAutoFit/>
           </a:bodyPr>
           <a:lstStyle/>
@@ -6277,6 +6426,7 @@
           <a:lstStyle/>
           <a:p>
             <a:pPr algn="ctr"/>
+            <a:endParaRPr/>
           </a:p>
         </p:txBody>
       </p:sp>
@@ -6297,7 +6447,7 @@
           <a:noFill/>
         </p:spPr>
         <p:txBody>
-          <a:bodyPr wrap="square" anchor="ctr" lIns="25400" rIns="25400" tIns="12700" bIns="12700">
+          <a:bodyPr wrap="square" lIns="25400" tIns="12700" rIns="25400" bIns="12700" anchor="ctr">
             <a:spAutoFit/>
           </a:bodyPr>
           <a:lstStyle/>
@@ -6371,6 +6521,7 @@
           <a:lstStyle/>
           <a:p>
             <a:pPr algn="ctr"/>
+            <a:endParaRPr/>
           </a:p>
         </p:txBody>
       </p:sp>
@@ -6391,7 +6542,7 @@
           <a:noFill/>
         </p:spPr>
         <p:txBody>
-          <a:bodyPr wrap="square" anchor="ctr" lIns="25400" rIns="25400" tIns="12700" bIns="12700">
+          <a:bodyPr wrap="square" lIns="25400" tIns="12700" rIns="25400" bIns="12700" anchor="ctr">
             <a:spAutoFit/>
           </a:bodyPr>
           <a:lstStyle/>
@@ -6465,6 +6616,7 @@
           <a:lstStyle/>
           <a:p>
             <a:pPr algn="ctr"/>
+            <a:endParaRPr/>
           </a:p>
         </p:txBody>
       </p:sp>
@@ -6485,7 +6637,7 @@
           <a:noFill/>
         </p:spPr>
         <p:txBody>
-          <a:bodyPr wrap="square" anchor="ctr" lIns="25400" rIns="25400" tIns="12700" bIns="12700">
+          <a:bodyPr wrap="square" lIns="25400" tIns="12700" rIns="25400" bIns="12700" anchor="ctr">
             <a:spAutoFit/>
           </a:bodyPr>
           <a:lstStyle/>
@@ -6559,6 +6711,7 @@
           <a:lstStyle/>
           <a:p>
             <a:pPr algn="ctr"/>
+            <a:endParaRPr/>
           </a:p>
         </p:txBody>
       </p:sp>
@@ -6579,7 +6732,7 @@
           <a:noFill/>
         </p:spPr>
         <p:txBody>
-          <a:bodyPr wrap="square" anchor="ctr" lIns="25400" rIns="25400" tIns="12700" bIns="12700">
+          <a:bodyPr wrap="square" lIns="25400" tIns="12700" rIns="25400" bIns="12700" anchor="ctr">
             <a:spAutoFit/>
           </a:bodyPr>
           <a:lstStyle/>
@@ -6653,6 +6806,7 @@
           <a:lstStyle/>
           <a:p>
             <a:pPr algn="ctr"/>
+            <a:endParaRPr/>
           </a:p>
         </p:txBody>
       </p:sp>
@@ -6673,7 +6827,7 @@
           <a:noFill/>
         </p:spPr>
         <p:txBody>
-          <a:bodyPr wrap="square" anchor="ctr" lIns="25400" rIns="25400" tIns="12700" bIns="12700">
+          <a:bodyPr wrap="square" lIns="25400" tIns="12700" rIns="25400" bIns="12700" anchor="ctr">
             <a:spAutoFit/>
           </a:bodyPr>
           <a:lstStyle/>
@@ -6745,6 +6899,7 @@
           <a:lstStyle/>
           <a:p>
             <a:pPr algn="ctr"/>
+            <a:endParaRPr/>
           </a:p>
         </p:txBody>
       </p:sp>
@@ -6789,6 +6944,7 @@
           <a:lstStyle/>
           <a:p>
             <a:pPr algn="ctr"/>
+            <a:endParaRPr/>
           </a:p>
         </p:txBody>
       </p:sp>
@@ -6837,6 +6993,7 @@
           <a:lstStyle/>
           <a:p>
             <a:pPr algn="ctr"/>
+            <a:endParaRPr/>
           </a:p>
         </p:txBody>
       </p:sp>
@@ -6879,7 +7036,7 @@
           </a:fontRef>
         </p:style>
         <p:txBody>
-          <a:bodyPr rtlCol="0" anchor="ctr" tIns="0" bIns="0"/>
+          <a:bodyPr tIns="0" bIns="0" rtlCol="0" anchor="ctr"/>
           <a:lstStyle/>
           <a:p>
             <a:pPr algn="ctr"/>
@@ -6913,12 +7070,12 @@
           <a:noFill/>
         </p:spPr>
         <p:txBody>
-          <a:bodyPr wrap="square" anchor="ctr" lIns="25400" rIns="25400" tIns="12700" bIns="12700">
+          <a:bodyPr wrap="square" lIns="25400" tIns="12700" rIns="25400" bIns="12700" anchor="ctr">
             <a:spAutoFit/>
           </a:bodyPr>
           <a:lstStyle/>
           <a:p>
-            <a:pPr algn="l" marL="190500" indent="-190500">
+            <a:pPr marL="190500" indent="-190500" algn="l">
               <a:lnSpc>
                 <a:spcPct val="103000"/>
               </a:lnSpc>
@@ -6952,7 +7109,7 @@
             </a:r>
           </a:p>
           <a:p>
-            <a:pPr algn="l" marL="355600" indent="-165100">
+            <a:pPr marL="355600" indent="-165100" algn="l">
               <a:lnSpc>
                 <a:spcPct val="103000"/>
               </a:lnSpc>
@@ -7009,7 +7166,7 @@
             </a:r>
           </a:p>
           <a:p>
-            <a:pPr algn="l" marL="190500" indent="-190500">
+            <a:pPr marL="190500" indent="-190500" algn="l">
               <a:lnSpc>
                 <a:spcPct val="103000"/>
               </a:lnSpc>
@@ -7043,7 +7200,7 @@
             </a:r>
           </a:p>
           <a:p>
-            <a:pPr algn="l" marL="355600" indent="-165100">
+            <a:pPr marL="355600" indent="-165100" algn="l">
               <a:lnSpc>
                 <a:spcPct val="103000"/>
               </a:lnSpc>
@@ -7146,6 +7303,7 @@
           <a:lstStyle/>
           <a:p>
             <a:pPr algn="ctr"/>
+            <a:endParaRPr/>
           </a:p>
         </p:txBody>
       </p:sp>
@@ -7190,6 +7348,7 @@
           <a:lstStyle/>
           <a:p>
             <a:pPr algn="ctr"/>
+            <a:endParaRPr/>
           </a:p>
         </p:txBody>
       </p:sp>
@@ -7234,6 +7393,7 @@
           <a:lstStyle/>
           <a:p>
             <a:pPr algn="ctr"/>
+            <a:endParaRPr/>
           </a:p>
         </p:txBody>
       </p:sp>
@@ -7278,6 +7438,7 @@
           <a:lstStyle/>
           <a:p>
             <a:pPr algn="ctr"/>
+            <a:endParaRPr/>
           </a:p>
         </p:txBody>
       </p:sp>
@@ -7322,6 +7483,7 @@
           <a:lstStyle/>
           <a:p>
             <a:pPr algn="ctr"/>
+            <a:endParaRPr/>
           </a:p>
         </p:txBody>
       </p:sp>
@@ -7366,6 +7528,7 @@
           <a:lstStyle/>
           <a:p>
             <a:pPr algn="ctr"/>
+            <a:endParaRPr/>
           </a:p>
         </p:txBody>
       </p:sp>
@@ -7410,6 +7573,7 @@
           <a:lstStyle/>
           <a:p>
             <a:pPr algn="ctr"/>
+            <a:endParaRPr/>
           </a:p>
         </p:txBody>
       </p:sp>
@@ -7454,6 +7618,7 @@
           <a:lstStyle/>
           <a:p>
             <a:pPr algn="ctr"/>
+            <a:endParaRPr/>
           </a:p>
         </p:txBody>
       </p:sp>
@@ -7500,6 +7665,7 @@
           <a:lstStyle/>
           <a:p>
             <a:pPr algn="ctr"/>
+            <a:endParaRPr/>
           </a:p>
         </p:txBody>
       </p:sp>
@@ -7546,6 +7712,7 @@
           <a:lstStyle/>
           <a:p>
             <a:pPr algn="ctr"/>
+            <a:endParaRPr/>
           </a:p>
         </p:txBody>
       </p:sp>
@@ -7592,6 +7759,7 @@
           <a:lstStyle/>
           <a:p>
             <a:pPr algn="ctr"/>
+            <a:endParaRPr/>
           </a:p>
         </p:txBody>
       </p:sp>
@@ -7636,6 +7804,7 @@
           <a:lstStyle/>
           <a:p>
             <a:pPr algn="ctr"/>
+            <a:endParaRPr/>
           </a:p>
         </p:txBody>
       </p:sp>
@@ -7680,6 +7849,7 @@
           <a:lstStyle/>
           <a:p>
             <a:pPr algn="ctr"/>
+            <a:endParaRPr/>
           </a:p>
         </p:txBody>
       </p:sp>
@@ -7728,6 +7898,7 @@
           <a:lstStyle/>
           <a:p>
             <a:pPr algn="ctr"/>
+            <a:endParaRPr/>
           </a:p>
         </p:txBody>
       </p:sp>
@@ -7770,7 +7941,7 @@
           </a:fontRef>
         </p:style>
         <p:txBody>
-          <a:bodyPr rtlCol="0" anchor="ctr" tIns="0" bIns="0"/>
+          <a:bodyPr tIns="0" bIns="0" rtlCol="0" anchor="ctr"/>
           <a:lstStyle/>
           <a:p>
             <a:pPr algn="ctr"/>
@@ -7804,12 +7975,12 @@
           <a:noFill/>
         </p:spPr>
         <p:txBody>
-          <a:bodyPr wrap="square" anchor="ctr" lIns="25400" rIns="25400" tIns="12700" bIns="12700">
+          <a:bodyPr wrap="square" lIns="25400" tIns="12700" rIns="25400" bIns="12700" anchor="ctr">
             <a:spAutoFit/>
           </a:bodyPr>
           <a:lstStyle/>
           <a:p>
-            <a:pPr algn="l" marL="190500" indent="-190500">
+            <a:pPr marL="190500" indent="-190500" algn="l">
               <a:lnSpc>
                 <a:spcPct val="103000"/>
               </a:lnSpc>
@@ -7843,7 +8014,7 @@
             </a:r>
           </a:p>
           <a:p>
-            <a:pPr algn="l" marL="355600" indent="-165100">
+            <a:pPr marL="355600" indent="-165100" algn="l">
               <a:lnSpc>
                 <a:spcPct val="103000"/>
               </a:lnSpc>
@@ -7890,7 +8061,7 @@
             </a:r>
           </a:p>
           <a:p>
-            <a:pPr algn="l" marL="190500" indent="-190500">
+            <a:pPr marL="190500" indent="-190500" algn="l">
               <a:lnSpc>
                 <a:spcPct val="103000"/>
               </a:lnSpc>
@@ -7924,7 +8095,7 @@
             </a:r>
           </a:p>
           <a:p>
-            <a:pPr algn="l" marL="355600" indent="-165100">
+            <a:pPr marL="355600" indent="-165100" algn="l">
               <a:lnSpc>
                 <a:spcPct val="103000"/>
               </a:lnSpc>
@@ -8012,6 +8183,7 @@
           <a:lstStyle/>
           <a:p>
             <a:pPr algn="ctr"/>
+            <a:endParaRPr/>
           </a:p>
         </p:txBody>
       </p:sp>
@@ -8056,6 +8228,7 @@
           <a:lstStyle/>
           <a:p>
             <a:pPr algn="ctr"/>
+            <a:endParaRPr/>
           </a:p>
         </p:txBody>
       </p:sp>
@@ -8100,6 +8273,7 @@
           <a:lstStyle/>
           <a:p>
             <a:pPr algn="ctr"/>
+            <a:endParaRPr/>
           </a:p>
         </p:txBody>
       </p:sp>
@@ -8144,6 +8318,7 @@
           <a:lstStyle/>
           <a:p>
             <a:pPr algn="ctr"/>
+            <a:endParaRPr/>
           </a:p>
         </p:txBody>
       </p:sp>
@@ -8190,6 +8365,7 @@
           <a:lstStyle/>
           <a:p>
             <a:pPr algn="ctr"/>
+            <a:endParaRPr/>
           </a:p>
         </p:txBody>
       </p:sp>
@@ -8234,6 +8410,7 @@
           <a:lstStyle/>
           <a:p>
             <a:pPr algn="ctr"/>
+            <a:endParaRPr/>
           </a:p>
         </p:txBody>
       </p:sp>
@@ -8280,6 +8457,7 @@
           <a:lstStyle/>
           <a:p>
             <a:pPr algn="ctr"/>
+            <a:endParaRPr/>
           </a:p>
         </p:txBody>
       </p:sp>
@@ -8324,6 +8502,7 @@
           <a:lstStyle/>
           <a:p>
             <a:pPr algn="ctr"/>
+            <a:endParaRPr/>
           </a:p>
         </p:txBody>
       </p:sp>
@@ -8370,6 +8549,7 @@
           <a:lstStyle/>
           <a:p>
             <a:pPr algn="ctr"/>
+            <a:endParaRPr/>
           </a:p>
         </p:txBody>
       </p:sp>
@@ -8414,6 +8594,7 @@
           <a:lstStyle/>
           <a:p>
             <a:pPr algn="ctr"/>
+            <a:endParaRPr/>
           </a:p>
         </p:txBody>
       </p:sp>
@@ -8460,6 +8641,7 @@
           <a:lstStyle/>
           <a:p>
             <a:pPr algn="ctr"/>
+            <a:endParaRPr/>
           </a:p>
         </p:txBody>
       </p:sp>
@@ -8504,6 +8686,7 @@
           <a:lstStyle/>
           <a:p>
             <a:pPr algn="ctr"/>
+            <a:endParaRPr/>
           </a:p>
         </p:txBody>
       </p:sp>
@@ -8552,6 +8735,7 @@
           <a:lstStyle/>
           <a:p>
             <a:pPr algn="ctr"/>
+            <a:endParaRPr/>
           </a:p>
         </p:txBody>
       </p:sp>
@@ -8594,7 +8778,7 @@
           </a:fontRef>
         </p:style>
         <p:txBody>
-          <a:bodyPr rtlCol="0" anchor="ctr" tIns="0" bIns="0"/>
+          <a:bodyPr tIns="0" bIns="0" rtlCol="0" anchor="ctr"/>
           <a:lstStyle/>
           <a:p>
             <a:pPr algn="ctr"/>
@@ -8628,12 +8812,12 @@
           <a:noFill/>
         </p:spPr>
         <p:txBody>
-          <a:bodyPr wrap="square" anchor="ctr" lIns="25400" rIns="25400" tIns="12700" bIns="12700">
+          <a:bodyPr wrap="square" lIns="25400" tIns="12700" rIns="25400" bIns="12700" anchor="ctr">
             <a:spAutoFit/>
           </a:bodyPr>
           <a:lstStyle/>
           <a:p>
-            <a:pPr algn="l" marL="190500" indent="-190500">
+            <a:pPr marL="190500" indent="-190500" algn="l">
               <a:lnSpc>
                 <a:spcPct val="103000"/>
               </a:lnSpc>
@@ -8667,7 +8851,7 @@
             </a:r>
           </a:p>
           <a:p>
-            <a:pPr algn="l" marL="355600" indent="-165100">
+            <a:pPr marL="355600" indent="-165100" algn="l">
               <a:lnSpc>
                 <a:spcPct val="103000"/>
               </a:lnSpc>
@@ -8714,7 +8898,7 @@
             </a:r>
           </a:p>
           <a:p>
-            <a:pPr algn="l" marL="190500" indent="-190500">
+            <a:pPr marL="190500" indent="-190500" algn="l">
               <a:lnSpc>
                 <a:spcPct val="103000"/>
               </a:lnSpc>
@@ -8748,7 +8932,7 @@
             </a:r>
           </a:p>
           <a:p>
-            <a:pPr algn="l" marL="355600" indent="-165100">
+            <a:pPr marL="355600" indent="-165100" algn="l">
               <a:lnSpc>
                 <a:spcPct val="103000"/>
               </a:lnSpc>
@@ -8836,6 +9020,7 @@
           <a:lstStyle/>
           <a:p>
             <a:pPr algn="ctr"/>
+            <a:endParaRPr/>
           </a:p>
         </p:txBody>
       </p:sp>
@@ -8880,6 +9065,7 @@
           <a:lstStyle/>
           <a:p>
             <a:pPr algn="ctr"/>
+            <a:endParaRPr/>
           </a:p>
         </p:txBody>
       </p:sp>
@@ -8924,6 +9110,7 @@
           <a:lstStyle/>
           <a:p>
             <a:pPr algn="ctr"/>
+            <a:endParaRPr/>
           </a:p>
         </p:txBody>
       </p:sp>
@@ -8968,6 +9155,7 @@
           <a:lstStyle/>
           <a:p>
             <a:pPr algn="ctr"/>
+            <a:endParaRPr/>
           </a:p>
         </p:txBody>
       </p:sp>
@@ -9012,6 +9200,7 @@
           <a:lstStyle/>
           <a:p>
             <a:pPr algn="ctr"/>
+            <a:endParaRPr/>
           </a:p>
         </p:txBody>
       </p:sp>
@@ -9056,6 +9245,7 @@
           <a:lstStyle/>
           <a:p>
             <a:pPr algn="ctr"/>
+            <a:endParaRPr/>
           </a:p>
         </p:txBody>
       </p:sp>
@@ -9100,6 +9290,7 @@
           <a:lstStyle/>
           <a:p>
             <a:pPr algn="ctr"/>
+            <a:endParaRPr/>
           </a:p>
         </p:txBody>
       </p:sp>
@@ -9144,6 +9335,7 @@
           <a:lstStyle/>
           <a:p>
             <a:pPr algn="ctr"/>
+            <a:endParaRPr/>
           </a:p>
         </p:txBody>
       </p:sp>
@@ -9188,6 +9380,7 @@
           <a:lstStyle/>
           <a:p>
             <a:pPr algn="ctr"/>
+            <a:endParaRPr/>
           </a:p>
         </p:txBody>
       </p:sp>
@@ -9208,7 +9401,7 @@
           <a:noFill/>
         </p:spPr>
         <p:txBody>
-          <a:bodyPr wrap="square" anchor="ctr" lIns="25400" rIns="25400" tIns="12700" bIns="12700">
+          <a:bodyPr wrap="square" lIns="25400" tIns="12700" rIns="25400" bIns="12700" anchor="ctr">
             <a:spAutoFit/>
           </a:bodyPr>
           <a:lstStyle/>
@@ -9254,7 +9447,7 @@
           <a:noFill/>
         </p:spPr>
         <p:txBody>
-          <a:bodyPr wrap="square" anchor="t" lIns="25400" rIns="25400" tIns="12700" bIns="12700">
+          <a:bodyPr wrap="square" lIns="25400" tIns="12700" rIns="25400" bIns="12700" anchor="t">
             <a:spAutoFit/>
           </a:bodyPr>
           <a:lstStyle/>
@@ -9326,6 +9519,7 @@
           <a:lstStyle/>
           <a:p>
             <a:pPr algn="ctr"/>
+            <a:endParaRPr/>
           </a:p>
         </p:txBody>
       </p:sp>
@@ -9346,7 +9540,7 @@
           <a:noFill/>
         </p:spPr>
         <p:txBody>
-          <a:bodyPr wrap="square" anchor="t" lIns="25400" rIns="25400" tIns="12700" bIns="12700">
+          <a:bodyPr wrap="square" lIns="25400" tIns="12700" rIns="25400" bIns="12700" anchor="t">
             <a:spAutoFit/>
           </a:bodyPr>
           <a:lstStyle/>
@@ -9418,6 +9612,7 @@
           <a:lstStyle/>
           <a:p>
             <a:pPr algn="ctr"/>
+            <a:endParaRPr/>
           </a:p>
         </p:txBody>
       </p:sp>
@@ -9438,7 +9633,7 @@
           <a:noFill/>
         </p:spPr>
         <p:txBody>
-          <a:bodyPr wrap="square" anchor="t" lIns="25400" rIns="25400" tIns="12700" bIns="12700">
+          <a:bodyPr wrap="square" lIns="25400" tIns="12700" rIns="25400" bIns="12700" anchor="t">
             <a:spAutoFit/>
           </a:bodyPr>
           <a:lstStyle/>
@@ -9510,6 +9705,7 @@
           <a:lstStyle/>
           <a:p>
             <a:pPr algn="ctr"/>
+            <a:endParaRPr/>
           </a:p>
         </p:txBody>
       </p:sp>
@@ -9530,7 +9726,7 @@
           <a:noFill/>
         </p:spPr>
         <p:txBody>
-          <a:bodyPr wrap="square" anchor="ctr" lIns="25400" rIns="25400" tIns="12700" bIns="12700">
+          <a:bodyPr wrap="square" lIns="25400" tIns="12700" rIns="25400" bIns="12700" anchor="ctr">
             <a:spAutoFit/>
           </a:bodyPr>
           <a:lstStyle/>
@@ -9626,7 +9822,7 @@
           <a:noFill/>
         </p:spPr>
         <p:txBody>
-          <a:bodyPr wrap="square" anchor="t" lIns="25400" rIns="25400" tIns="12700" bIns="12700">
+          <a:bodyPr wrap="square" lIns="25400" tIns="12700" rIns="25400" bIns="12700" anchor="t">
             <a:spAutoFit/>
           </a:bodyPr>
           <a:lstStyle/>
@@ -9664,7 +9860,7 @@
 </file>
 
 <file path=ppt/slides/slide2.xml><?xml version="1.0" encoding="utf-8"?>
-<p:sld xmlns:a="http://schemas.openxmlformats.org/drawingml/2006/main" xmlns:p="http://schemas.openxmlformats.org/presentationml/2006/main" xmlns:r="http://schemas.openxmlformats.org/officeDocument/2006/relationships">
+<p:sld xmlns:a="http://schemas.openxmlformats.org/drawingml/2006/main" xmlns:r="http://schemas.openxmlformats.org/officeDocument/2006/relationships" xmlns:p="http://schemas.openxmlformats.org/presentationml/2006/main">
   <p:cSld>
     <p:spTree>
       <p:nvGrpSpPr>
@@ -9672,7 +9868,14 @@
         <p:cNvGrpSpPr/>
         <p:nvPr/>
       </p:nvGrpSpPr>
-      <p:grpSpPr/>
+      <p:grpSpPr>
+        <a:xfrm>
+          <a:off x="0" y="0"/>
+          <a:ext cx="0" cy="0"/>
+          <a:chOff x="0" y="0"/>
+          <a:chExt cx="0" cy="0"/>
+        </a:xfrm>
+      </p:grpSpPr>
       <p:sp>
         <p:nvSpPr>
           <p:cNvPr id="2" name="TextBox 1"/>
@@ -9690,7 +9893,7 @@
           <a:noFill/>
         </p:spPr>
         <p:txBody>
-          <a:bodyPr wrap="square" anchor="ctr" lIns="25400" rIns="25400" tIns="12700" bIns="12700">
+          <a:bodyPr wrap="square" lIns="25400" tIns="12700" rIns="25400" bIns="12700" anchor="ctr">
             <a:spAutoFit/>
           </a:bodyPr>
           <a:lstStyle/>
@@ -9780,6 +9983,7 @@
           <a:lstStyle/>
           <a:p>
             <a:pPr algn="ctr"/>
+            <a:endParaRPr/>
           </a:p>
         </p:txBody>
       </p:sp>
@@ -9822,7 +10026,7 @@
           </a:fontRef>
         </p:style>
         <p:txBody>
-          <a:bodyPr rtlCol="0" anchor="ctr" wrap="none" lIns="12700" rIns="12700" tIns="0" bIns="0"/>
+          <a:bodyPr wrap="none" lIns="12700" tIns="0" rIns="12700" bIns="0" rtlCol="0" anchor="ctr"/>
           <a:lstStyle/>
           <a:p>
             <a:pPr algn="ctr"/>
@@ -9878,7 +10082,7 @@
           </a:fontRef>
         </p:style>
         <p:txBody>
-          <a:bodyPr rtlCol="0" anchor="ctr" wrap="none" lIns="12700" rIns="12700" tIns="0" bIns="0"/>
+          <a:bodyPr wrap="none" lIns="12700" tIns="0" rIns="12700" bIns="0" rtlCol="0" anchor="ctr"/>
           <a:lstStyle/>
           <a:p>
             <a:pPr algn="ctr"/>
@@ -9934,7 +10138,7 @@
           </a:fontRef>
         </p:style>
         <p:txBody>
-          <a:bodyPr rtlCol="0" anchor="ctr" wrap="none" lIns="12700" rIns="12700" tIns="0" bIns="0"/>
+          <a:bodyPr wrap="none" lIns="12700" tIns="0" rIns="12700" bIns="0" rtlCol="0" anchor="ctr"/>
           <a:lstStyle/>
           <a:p>
             <a:pPr algn="ctr"/>
@@ -9990,7 +10194,7 @@
           </a:fontRef>
         </p:style>
         <p:txBody>
-          <a:bodyPr rtlCol="0" anchor="ctr" wrap="none" lIns="12700" rIns="12700" tIns="0" bIns="0"/>
+          <a:bodyPr wrap="none" lIns="12700" tIns="0" rIns="12700" bIns="0" rtlCol="0" anchor="ctr"/>
           <a:lstStyle/>
           <a:p>
             <a:pPr algn="ctr"/>
@@ -10046,7 +10250,7 @@
           </a:fontRef>
         </p:style>
         <p:txBody>
-          <a:bodyPr rtlCol="0" anchor="ctr" wrap="none" lIns="12700" rIns="12700" tIns="0" bIns="0"/>
+          <a:bodyPr wrap="none" lIns="12700" tIns="0" rIns="12700" bIns="0" rtlCol="0" anchor="ctr"/>
           <a:lstStyle/>
           <a:p>
             <a:pPr algn="ctr"/>
@@ -10108,6 +10312,7 @@
           <a:lstStyle/>
           <a:p>
             <a:pPr algn="ctr"/>
+            <a:endParaRPr/>
           </a:p>
         </p:txBody>
       </p:sp>
@@ -10150,7 +10355,7 @@
           </a:fontRef>
         </p:style>
         <p:txBody>
-          <a:bodyPr rtlCol="0" anchor="ctr" tIns="0" bIns="0"/>
+          <a:bodyPr tIns="0" bIns="0" rtlCol="0" anchor="ctr"/>
           <a:lstStyle/>
           <a:p>
             <a:pPr algn="ctr"/>
@@ -10212,6 +10417,7 @@
           <a:lstStyle/>
           <a:p>
             <a:pPr algn="ctr"/>
+            <a:endParaRPr/>
           </a:p>
         </p:txBody>
       </p:sp>
@@ -10254,7 +10460,7 @@
           </a:fontRef>
         </p:style>
         <p:txBody>
-          <a:bodyPr rtlCol="0" anchor="ctr" tIns="0" bIns="0"/>
+          <a:bodyPr tIns="0" bIns="0" rtlCol="0" anchor="ctr"/>
           <a:lstStyle/>
           <a:p>
             <a:pPr algn="ctr"/>
@@ -10316,6 +10522,7 @@
           <a:lstStyle/>
           <a:p>
             <a:pPr algn="ctr"/>
+            <a:endParaRPr/>
           </a:p>
         </p:txBody>
       </p:sp>
@@ -10358,7 +10565,7 @@
           </a:fontRef>
         </p:style>
         <p:txBody>
-          <a:bodyPr rtlCol="0" anchor="ctr" tIns="0" bIns="0"/>
+          <a:bodyPr tIns="0" bIns="0" rtlCol="0" anchor="ctr"/>
           <a:lstStyle/>
           <a:p>
             <a:pPr algn="ctr"/>
@@ -10392,12 +10599,12 @@
           <a:noFill/>
         </p:spPr>
         <p:txBody>
-          <a:bodyPr wrap="square" anchor="t" lIns="25400" rIns="25400" tIns="12700" bIns="12700">
+          <a:bodyPr wrap="square" lIns="25400" tIns="12700" rIns="25400" bIns="12700" anchor="t">
             <a:spAutoFit/>
           </a:bodyPr>
           <a:lstStyle/>
           <a:p>
-            <a:pPr algn="l" marL="190500" indent="-190500">
+            <a:pPr marL="190500" indent="-190500" algn="l">
               <a:lnSpc>
                 <a:spcPct val="103000"/>
               </a:lnSpc>
@@ -10431,7 +10638,7 @@
             </a:r>
           </a:p>
           <a:p>
-            <a:pPr algn="l" marL="355600" indent="-165100">
+            <a:pPr marL="355600" indent="-165100" algn="l">
               <a:lnSpc>
                 <a:spcPct val="103000"/>
               </a:lnSpc>
@@ -10486,7 +10693,7 @@
           <a:noFill/>
         </p:spPr>
         <p:txBody>
-          <a:bodyPr wrap="square" anchor="t" lIns="25400" rIns="25400" tIns="12700" bIns="12700">
+          <a:bodyPr wrap="square" lIns="25400" tIns="12700" rIns="25400" bIns="12700" anchor="t">
             <a:spAutoFit/>
           </a:bodyPr>
           <a:lstStyle/>
@@ -10529,7 +10736,7 @@
         </p:xfrm>
         <a:graphic>
           <a:graphicData uri="http://schemas.openxmlformats.org/drawingml/2006/chart">
-            <c:chart xmlns:c="http://schemas.openxmlformats.org/drawingml/2006/chart" r:id="rId2"/>
+            <c:chart xmlns:c="http://schemas.openxmlformats.org/drawingml/2006/chart" xmlns:r="http://schemas.openxmlformats.org/officeDocument/2006/relationships" r:id="rId2"/>
           </a:graphicData>
         </a:graphic>
       </p:graphicFrame>
@@ -10578,6 +10785,7 @@
           <a:lstStyle/>
           <a:p>
             <a:pPr algn="ctr"/>
+            <a:endParaRPr/>
           </a:p>
         </p:txBody>
       </p:sp>
@@ -10598,7 +10806,7 @@
           <a:noFill/>
         </p:spPr>
         <p:txBody>
-          <a:bodyPr wrap="square" anchor="ctr" lIns="25400" rIns="25400" tIns="12700" bIns="12700">
+          <a:bodyPr wrap="square" lIns="25400" tIns="12700" rIns="25400" bIns="12700" anchor="ctr">
             <a:spAutoFit/>
           </a:bodyPr>
           <a:lstStyle/>
@@ -10667,7 +10875,7 @@
           <a:noFill/>
         </p:spPr>
         <p:txBody>
-          <a:bodyPr wrap="square" anchor="t" lIns="25400" rIns="25400" tIns="12700" bIns="12700">
+          <a:bodyPr wrap="square" lIns="25400" tIns="12700" rIns="25400" bIns="12700" anchor="t">
             <a:spAutoFit/>
           </a:bodyPr>
           <a:lstStyle/>
@@ -10739,6 +10947,7 @@
           <a:lstStyle/>
           <a:p>
             <a:pPr algn="ctr"/>
+            <a:endParaRPr/>
           </a:p>
         </p:txBody>
       </p:sp>
@@ -10759,7 +10968,7 @@
           <a:noFill/>
         </p:spPr>
         <p:txBody>
-          <a:bodyPr wrap="square" anchor="ctr" lIns="25400" rIns="25400" tIns="12700" bIns="12700">
+          <a:bodyPr wrap="square" lIns="25400" tIns="12700" rIns="25400" bIns="12700" anchor="ctr">
             <a:spAutoFit/>
           </a:bodyPr>
           <a:lstStyle/>
@@ -10805,7 +11014,7 @@
           <a:noFill/>
         </p:spPr>
         <p:txBody>
-          <a:bodyPr wrap="square" anchor="t" lIns="25400" rIns="25400" tIns="12700" bIns="12700">
+          <a:bodyPr wrap="square" lIns="25400" tIns="12700" rIns="25400" bIns="12700" anchor="t">
             <a:spAutoFit/>
           </a:bodyPr>
           <a:lstStyle/>
@@ -10933,6 +11142,7 @@
           <a:lstStyle/>
           <a:p>
             <a:pPr algn="ctr"/>
+            <a:endParaRPr/>
           </a:p>
         </p:txBody>
       </p:sp>
@@ -10953,7 +11163,7 @@
           <a:noFill/>
         </p:spPr>
         <p:txBody>
-          <a:bodyPr wrap="square" anchor="ctr" lIns="25400" rIns="25400" tIns="12700" bIns="12700">
+          <a:bodyPr wrap="square" lIns="25400" tIns="12700" rIns="25400" bIns="12700" anchor="ctr">
             <a:spAutoFit/>
           </a:bodyPr>
           <a:lstStyle/>
@@ -10999,7 +11209,7 @@
           <a:noFill/>
         </p:spPr>
         <p:txBody>
-          <a:bodyPr wrap="square" anchor="t" lIns="25400" rIns="25400" tIns="12700" bIns="12700">
+          <a:bodyPr wrap="square" lIns="25400" tIns="12700" rIns="25400" bIns="12700" anchor="t">
             <a:spAutoFit/>
           </a:bodyPr>
           <a:lstStyle/>
@@ -11127,6 +11337,7 @@
           <a:lstStyle/>
           <a:p>
             <a:pPr algn="ctr"/>
+            <a:endParaRPr/>
           </a:p>
         </p:txBody>
       </p:sp>
@@ -11147,7 +11358,7 @@
           <a:noFill/>
         </p:spPr>
         <p:txBody>
-          <a:bodyPr wrap="square" anchor="ctr" lIns="25400" rIns="25400" tIns="12700" bIns="12700">
+          <a:bodyPr wrap="square" lIns="25400" tIns="12700" rIns="25400" bIns="12700" anchor="ctr">
             <a:spAutoFit/>
           </a:bodyPr>
           <a:lstStyle/>
@@ -11193,7 +11404,7 @@
           <a:noFill/>
         </p:spPr>
         <p:txBody>
-          <a:bodyPr wrap="square" anchor="t" lIns="25400" rIns="25400" tIns="12700" bIns="12700">
+          <a:bodyPr wrap="square" lIns="25400" tIns="12700" rIns="25400" bIns="12700" anchor="t">
             <a:spAutoFit/>
           </a:bodyPr>
           <a:lstStyle/>
@@ -11295,12 +11506,12 @@
           <a:noFill/>
         </p:spPr>
         <p:txBody>
-          <a:bodyPr wrap="square" anchor="t" lIns="25400" rIns="25400" tIns="12700" bIns="12700">
+          <a:bodyPr wrap="square" lIns="25400" tIns="12700" rIns="25400" bIns="12700" anchor="t">
             <a:spAutoFit/>
           </a:bodyPr>
           <a:lstStyle/>
           <a:p>
-            <a:pPr algn="l" marL="190500" indent="-190500">
+            <a:pPr marL="190500" indent="-190500" algn="l">
               <a:lnSpc>
                 <a:spcPct val="103000"/>
               </a:lnSpc>
@@ -11334,7 +11545,7 @@
             </a:r>
           </a:p>
           <a:p>
-            <a:pPr algn="l" marL="355600" indent="-165100">
+            <a:pPr marL="355600" indent="-165100" algn="l">
               <a:lnSpc>
                 <a:spcPct val="103000"/>
               </a:lnSpc>
@@ -11423,6 +11634,7 @@
           <a:lstStyle/>
           <a:p>
             <a:pPr algn="ctr"/>
+            <a:endParaRPr/>
           </a:p>
         </p:txBody>
       </p:sp>
@@ -11443,7 +11655,7 @@
           <a:noFill/>
         </p:spPr>
         <p:txBody>
-          <a:bodyPr wrap="square" anchor="ctr" lIns="25400" rIns="25400" tIns="12700" bIns="12700">
+          <a:bodyPr wrap="square" lIns="25400" tIns="12700" rIns="25400" bIns="12700" anchor="ctr">
             <a:spAutoFit/>
           </a:bodyPr>
           <a:lstStyle/>
@@ -11513,6 +11725,7 @@
           <a:lstStyle/>
           <a:p>
             <a:pPr algn="ctr"/>
+            <a:endParaRPr/>
           </a:p>
         </p:txBody>
       </p:sp>
@@ -11533,7 +11746,7 @@
           <a:noFill/>
         </p:spPr>
         <p:txBody>
-          <a:bodyPr wrap="square" anchor="ctr" lIns="25400" rIns="25400" tIns="12700" bIns="12700">
+          <a:bodyPr wrap="square" lIns="25400" tIns="12700" rIns="25400" bIns="12700" anchor="ctr">
             <a:spAutoFit/>
           </a:bodyPr>
           <a:lstStyle/>
@@ -11603,6 +11816,7 @@
           <a:lstStyle/>
           <a:p>
             <a:pPr algn="ctr"/>
+            <a:endParaRPr/>
           </a:p>
         </p:txBody>
       </p:sp>
@@ -11649,6 +11863,7 @@
           <a:lstStyle/>
           <a:p>
             <a:pPr algn="ctr"/>
+            <a:endParaRPr/>
           </a:p>
         </p:txBody>
       </p:sp>
@@ -11669,7 +11884,7 @@
           <a:noFill/>
         </p:spPr>
         <p:txBody>
-          <a:bodyPr wrap="square" anchor="ctr" lIns="25400" rIns="25400" tIns="12700" bIns="12700">
+          <a:bodyPr wrap="square" lIns="25400" tIns="12700" rIns="25400" bIns="12700" anchor="ctr">
             <a:spAutoFit/>
           </a:bodyPr>
           <a:lstStyle/>
@@ -11715,7 +11930,7 @@
           <a:noFill/>
         </p:spPr>
         <p:txBody>
-          <a:bodyPr wrap="square" anchor="ctr" lIns="25400" rIns="25400" tIns="12700" bIns="12700">
+          <a:bodyPr wrap="square" lIns="25400" tIns="12700" rIns="25400" bIns="12700" anchor="ctr">
             <a:spAutoFit/>
           </a:bodyPr>
           <a:lstStyle/>
@@ -11810,6 +12025,7 @@
           <a:lstStyle/>
           <a:p>
             <a:pPr algn="ctr"/>
+            <a:endParaRPr/>
           </a:p>
         </p:txBody>
       </p:sp>
@@ -11830,7 +12046,7 @@
           <a:noFill/>
         </p:spPr>
         <p:txBody>
-          <a:bodyPr wrap="square" anchor="ctr" lIns="25400" rIns="25400" tIns="12700" bIns="12700">
+          <a:bodyPr wrap="square" lIns="25400" tIns="12700" rIns="25400" bIns="12700" anchor="ctr">
             <a:spAutoFit/>
           </a:bodyPr>
           <a:lstStyle/>
@@ -11876,7 +12092,7 @@
           <a:noFill/>
         </p:spPr>
         <p:txBody>
-          <a:bodyPr wrap="square" anchor="ctr" lIns="25400" rIns="25400" tIns="12700" bIns="12700">
+          <a:bodyPr wrap="square" lIns="25400" tIns="12700" rIns="25400" bIns="12700" anchor="ctr">
             <a:spAutoFit/>
           </a:bodyPr>
           <a:lstStyle/>
@@ -11971,6 +12187,7 @@
           <a:lstStyle/>
           <a:p>
             <a:pPr algn="ctr"/>
+            <a:endParaRPr/>
           </a:p>
         </p:txBody>
       </p:sp>
@@ -11991,7 +12208,7 @@
           <a:noFill/>
         </p:spPr>
         <p:txBody>
-          <a:bodyPr wrap="square" anchor="ctr" lIns="25400" rIns="25400" tIns="12700" bIns="12700">
+          <a:bodyPr wrap="square" lIns="25400" tIns="12700" rIns="25400" bIns="12700" anchor="ctr">
             <a:spAutoFit/>
           </a:bodyPr>
           <a:lstStyle/>
@@ -12037,7 +12254,7 @@
           <a:noFill/>
         </p:spPr>
         <p:txBody>
-          <a:bodyPr wrap="square" anchor="ctr" lIns="25400" rIns="25400" tIns="12700" bIns="12700">
+          <a:bodyPr wrap="square" lIns="25400" tIns="12700" rIns="25400" bIns="12700" anchor="ctr">
             <a:spAutoFit/>
           </a:bodyPr>
           <a:lstStyle/>
@@ -12132,6 +12349,7 @@
           <a:lstStyle/>
           <a:p>
             <a:pPr algn="ctr"/>
+            <a:endParaRPr/>
           </a:p>
         </p:txBody>
       </p:sp>
@@ -12152,7 +12370,7 @@
           <a:noFill/>
         </p:spPr>
         <p:txBody>
-          <a:bodyPr wrap="square" anchor="ctr" lIns="25400" rIns="25400" tIns="12700" bIns="12700">
+          <a:bodyPr wrap="square" lIns="25400" tIns="12700" rIns="25400" bIns="12700" anchor="ctr">
             <a:spAutoFit/>
           </a:bodyPr>
           <a:lstStyle/>
@@ -12198,7 +12416,7 @@
           <a:noFill/>
         </p:spPr>
         <p:txBody>
-          <a:bodyPr wrap="square" anchor="ctr" lIns="25400" rIns="25400" tIns="12700" bIns="12700">
+          <a:bodyPr wrap="square" lIns="25400" tIns="12700" rIns="25400" bIns="12700" anchor="ctr">
             <a:spAutoFit/>
           </a:bodyPr>
           <a:lstStyle/>
@@ -12293,6 +12511,7 @@
           <a:lstStyle/>
           <a:p>
             <a:pPr algn="ctr"/>
+            <a:endParaRPr/>
           </a:p>
         </p:txBody>
       </p:sp>
@@ -12313,7 +12532,7 @@
           <a:noFill/>
         </p:spPr>
         <p:txBody>
-          <a:bodyPr wrap="square" anchor="ctr" lIns="25400" rIns="25400" tIns="12700" bIns="12700">
+          <a:bodyPr wrap="square" lIns="25400" tIns="12700" rIns="25400" bIns="12700" anchor="ctr">
             <a:spAutoFit/>
           </a:bodyPr>
           <a:lstStyle/>
@@ -12359,7 +12578,7 @@
           <a:noFill/>
         </p:spPr>
         <p:txBody>
-          <a:bodyPr wrap="square" anchor="ctr" lIns="25400" rIns="25400" tIns="12700" bIns="12700">
+          <a:bodyPr wrap="square" lIns="25400" tIns="12700" rIns="25400" bIns="12700" anchor="ctr">
             <a:spAutoFit/>
           </a:bodyPr>
           <a:lstStyle/>
@@ -12428,12 +12647,12 @@
           <a:noFill/>
         </p:spPr>
         <p:txBody>
-          <a:bodyPr wrap="square" anchor="t" lIns="25400" rIns="25400" tIns="12700" bIns="12700">
+          <a:bodyPr wrap="square" lIns="25400" tIns="12700" rIns="25400" bIns="12700" anchor="t">
             <a:spAutoFit/>
           </a:bodyPr>
           <a:lstStyle/>
           <a:p>
-            <a:pPr algn="l" marL="190500" indent="-190500">
+            <a:pPr marL="190500" indent="-190500" algn="l">
               <a:lnSpc>
                 <a:spcPct val="103000"/>
               </a:lnSpc>
@@ -12485,7 +12704,7 @@
           <a:noFill/>
         </p:spPr>
         <p:txBody>
-          <a:bodyPr wrap="square" anchor="t" lIns="25400" rIns="25400" tIns="12700" bIns="12700">
+          <a:bodyPr wrap="square" lIns="25400" tIns="12700" rIns="25400" bIns="12700" anchor="t">
             <a:spAutoFit/>
           </a:bodyPr>
           <a:lstStyle/>
@@ -12528,7 +12747,7 @@
         </p:xfrm>
         <a:graphic>
           <a:graphicData uri="http://schemas.openxmlformats.org/drawingml/2006/chart">
-            <c:chart xmlns:c="http://schemas.openxmlformats.org/drawingml/2006/chart" r:id="rId3"/>
+            <c:chart xmlns:c="http://schemas.openxmlformats.org/drawingml/2006/chart" xmlns:r="http://schemas.openxmlformats.org/officeDocument/2006/relationships" r:id="rId3"/>
           </a:graphicData>
         </a:graphic>
       </p:graphicFrame>
@@ -12549,7 +12768,7 @@
           <a:noFill/>
         </p:spPr>
         <p:txBody>
-          <a:bodyPr wrap="square" anchor="t" lIns="25400" rIns="25400" tIns="12700" bIns="12700">
+          <a:bodyPr wrap="square" lIns="25400" tIns="12700" rIns="25400" bIns="12700" anchor="t">
             <a:spAutoFit/>
           </a:bodyPr>
           <a:lstStyle/>
@@ -12623,6 +12842,7 @@
           <a:lstStyle/>
           <a:p>
             <a:pPr algn="ctr"/>
+            <a:endParaRPr/>
           </a:p>
         </p:txBody>
       </p:sp>
@@ -12643,7 +12863,7 @@
           <a:noFill/>
         </p:spPr>
         <p:txBody>
-          <a:bodyPr wrap="square" anchor="ctr" lIns="25400" rIns="25400" tIns="12700" bIns="12700">
+          <a:bodyPr wrap="square" lIns="25400" tIns="12700" rIns="25400" bIns="12700" anchor="ctr">
             <a:spAutoFit/>
           </a:bodyPr>
           <a:lstStyle/>
@@ -12717,6 +12937,7 @@
           <a:lstStyle/>
           <a:p>
             <a:pPr algn="ctr"/>
+            <a:endParaRPr/>
           </a:p>
         </p:txBody>
       </p:sp>
@@ -12737,7 +12958,7 @@
           <a:noFill/>
         </p:spPr>
         <p:txBody>
-          <a:bodyPr wrap="square" anchor="ctr" lIns="25400" rIns="25400" tIns="12700" bIns="12700">
+          <a:bodyPr wrap="square" lIns="25400" tIns="12700" rIns="25400" bIns="12700" anchor="ctr">
             <a:spAutoFit/>
           </a:bodyPr>
           <a:lstStyle/>
@@ -12811,6 +13032,7 @@
           <a:lstStyle/>
           <a:p>
             <a:pPr algn="ctr"/>
+            <a:endParaRPr/>
           </a:p>
         </p:txBody>
       </p:sp>
@@ -12831,7 +13053,7 @@
           <a:noFill/>
         </p:spPr>
         <p:txBody>
-          <a:bodyPr wrap="square" anchor="ctr" lIns="25400" rIns="25400" tIns="12700" bIns="12700">
+          <a:bodyPr wrap="square" lIns="25400" tIns="12700" rIns="25400" bIns="12700" anchor="ctr">
             <a:spAutoFit/>
           </a:bodyPr>
           <a:lstStyle/>
@@ -12877,7 +13099,7 @@
           <a:noFill/>
         </p:spPr>
         <p:txBody>
-          <a:bodyPr wrap="square" anchor="t" lIns="25400" rIns="25400" tIns="12700" bIns="12700">
+          <a:bodyPr wrap="square" lIns="25400" tIns="12700" rIns="25400" bIns="12700" anchor="t">
             <a:spAutoFit/>
           </a:bodyPr>
           <a:lstStyle/>
@@ -12959,6 +13181,7 @@
           <a:lstStyle/>
           <a:p>
             <a:pPr algn="ctr"/>
+            <a:endParaRPr/>
           </a:p>
         </p:txBody>
       </p:sp>
@@ -12979,7 +13202,7 @@
           <a:noFill/>
         </p:spPr>
         <p:txBody>
-          <a:bodyPr wrap="square" anchor="ctr" lIns="25400" rIns="25400" tIns="12700" bIns="12700">
+          <a:bodyPr wrap="square" lIns="25400" tIns="12700" rIns="25400" bIns="12700" anchor="ctr">
             <a:spAutoFit/>
           </a:bodyPr>
           <a:lstStyle/>
@@ -13065,7 +13288,7 @@
           <a:noFill/>
         </p:spPr>
         <p:txBody>
-          <a:bodyPr wrap="square" anchor="t" lIns="25400" rIns="25400" tIns="12700" bIns="12700">
+          <a:bodyPr wrap="square" lIns="25400" tIns="12700" rIns="25400" bIns="12700" anchor="t">
             <a:spAutoFit/>
           </a:bodyPr>
           <a:lstStyle/>
@@ -13103,7 +13326,7 @@
 </file>
 
 <file path=ppt/slides/slide3.xml><?xml version="1.0" encoding="utf-8"?>
-<p:sld xmlns:a="http://schemas.openxmlformats.org/drawingml/2006/main" xmlns:p="http://schemas.openxmlformats.org/presentationml/2006/main" xmlns:r="http://schemas.openxmlformats.org/officeDocument/2006/relationships">
+<p:sld xmlns:a="http://schemas.openxmlformats.org/drawingml/2006/main" xmlns:r="http://schemas.openxmlformats.org/officeDocument/2006/relationships" xmlns:p="http://schemas.openxmlformats.org/presentationml/2006/main">
   <p:cSld>
     <p:spTree>
       <p:nvGrpSpPr>
@@ -13111,7 +13334,14 @@
         <p:cNvGrpSpPr/>
         <p:nvPr/>
       </p:nvGrpSpPr>
-      <p:grpSpPr/>
+      <p:grpSpPr>
+        <a:xfrm>
+          <a:off x="0" y="0"/>
+          <a:ext cx="0" cy="0"/>
+          <a:chOff x="0" y="0"/>
+          <a:chExt cx="0" cy="0"/>
+        </a:xfrm>
+      </p:grpSpPr>
       <p:sp>
         <p:nvSpPr>
           <p:cNvPr id="2" name="TextBox 1"/>
@@ -13129,7 +13359,7 @@
           <a:noFill/>
         </p:spPr>
         <p:txBody>
-          <a:bodyPr wrap="square" anchor="ctr" lIns="25400" rIns="25400" tIns="12700" bIns="12700">
+          <a:bodyPr wrap="square" lIns="25400" tIns="12700" rIns="25400" bIns="12700" anchor="ctr">
             <a:spAutoFit/>
           </a:bodyPr>
           <a:lstStyle/>
@@ -13219,6 +13449,7 @@
           <a:lstStyle/>
           <a:p>
             <a:pPr algn="ctr"/>
+            <a:endParaRPr/>
           </a:p>
         </p:txBody>
       </p:sp>
@@ -13261,7 +13492,7 @@
           </a:fontRef>
         </p:style>
         <p:txBody>
-          <a:bodyPr rtlCol="0" anchor="ctr" wrap="none" lIns="12700" rIns="12700" tIns="0" bIns="0"/>
+          <a:bodyPr wrap="none" lIns="12700" tIns="0" rIns="12700" bIns="0" rtlCol="0" anchor="ctr"/>
           <a:lstStyle/>
           <a:p>
             <a:pPr algn="ctr"/>
@@ -13317,7 +13548,7 @@
           </a:fontRef>
         </p:style>
         <p:txBody>
-          <a:bodyPr rtlCol="0" anchor="ctr" wrap="none" lIns="12700" rIns="12700" tIns="0" bIns="0"/>
+          <a:bodyPr wrap="none" lIns="12700" tIns="0" rIns="12700" bIns="0" rtlCol="0" anchor="ctr"/>
           <a:lstStyle/>
           <a:p>
             <a:pPr algn="ctr"/>
@@ -13373,7 +13604,7 @@
           </a:fontRef>
         </p:style>
         <p:txBody>
-          <a:bodyPr rtlCol="0" anchor="ctr" wrap="none" lIns="12700" rIns="12700" tIns="0" bIns="0"/>
+          <a:bodyPr wrap="none" lIns="12700" tIns="0" rIns="12700" bIns="0" rtlCol="0" anchor="ctr"/>
           <a:lstStyle/>
           <a:p>
             <a:pPr algn="ctr"/>
@@ -13429,7 +13660,7 @@
           </a:fontRef>
         </p:style>
         <p:txBody>
-          <a:bodyPr rtlCol="0" anchor="ctr" wrap="none" lIns="12700" rIns="12700" tIns="0" bIns="0"/>
+          <a:bodyPr wrap="none" lIns="12700" tIns="0" rIns="12700" bIns="0" rtlCol="0" anchor="ctr"/>
           <a:lstStyle/>
           <a:p>
             <a:pPr algn="ctr"/>
@@ -13485,7 +13716,7 @@
           </a:fontRef>
         </p:style>
         <p:txBody>
-          <a:bodyPr rtlCol="0" anchor="ctr" wrap="none" lIns="12700" rIns="12700" tIns="0" bIns="0"/>
+          <a:bodyPr wrap="none" lIns="12700" tIns="0" rIns="12700" bIns="0" rtlCol="0" anchor="ctr"/>
           <a:lstStyle/>
           <a:p>
             <a:pPr algn="ctr"/>
@@ -13547,6 +13778,7 @@
           <a:lstStyle/>
           <a:p>
             <a:pPr algn="ctr"/>
+            <a:endParaRPr/>
           </a:p>
         </p:txBody>
       </p:sp>
@@ -13589,7 +13821,7 @@
           </a:fontRef>
         </p:style>
         <p:txBody>
-          <a:bodyPr rtlCol="0" anchor="ctr" tIns="0" bIns="0"/>
+          <a:bodyPr tIns="0" bIns="0" rtlCol="0" anchor="ctr"/>
           <a:lstStyle/>
           <a:p>
             <a:pPr algn="ctr"/>
@@ -13651,6 +13883,7 @@
           <a:lstStyle/>
           <a:p>
             <a:pPr algn="ctr"/>
+            <a:endParaRPr/>
           </a:p>
         </p:txBody>
       </p:sp>
@@ -13693,7 +13926,7 @@
           </a:fontRef>
         </p:style>
         <p:txBody>
-          <a:bodyPr rtlCol="0" anchor="ctr" tIns="0" bIns="0"/>
+          <a:bodyPr tIns="0" bIns="0" rtlCol="0" anchor="ctr"/>
           <a:lstStyle/>
           <a:p>
             <a:pPr algn="ctr"/>
@@ -13755,6 +13988,7 @@
           <a:lstStyle/>
           <a:p>
             <a:pPr algn="ctr"/>
+            <a:endParaRPr/>
           </a:p>
         </p:txBody>
       </p:sp>
@@ -13797,7 +14031,7 @@
           </a:fontRef>
         </p:style>
         <p:txBody>
-          <a:bodyPr rtlCol="0" anchor="ctr" tIns="0" bIns="0"/>
+          <a:bodyPr tIns="0" bIns="0" rtlCol="0" anchor="ctr"/>
           <a:lstStyle/>
           <a:p>
             <a:pPr algn="ctr"/>
@@ -13831,12 +14065,12 @@
           <a:noFill/>
         </p:spPr>
         <p:txBody>
-          <a:bodyPr wrap="square" anchor="t" lIns="25400" rIns="25400" tIns="12700" bIns="12700">
+          <a:bodyPr wrap="square" lIns="25400" tIns="12700" rIns="25400" bIns="12700" anchor="t">
             <a:spAutoFit/>
           </a:bodyPr>
           <a:lstStyle/>
           <a:p>
-            <a:pPr algn="l" marL="190500" indent="-190500">
+            <a:pPr marL="190500" indent="-190500" algn="l">
               <a:lnSpc>
                 <a:spcPct val="103000"/>
               </a:lnSpc>
@@ -13870,7 +14104,7 @@
             </a:r>
           </a:p>
           <a:p>
-            <a:pPr algn="l" marL="355600" indent="-165100">
+            <a:pPr marL="355600" indent="-165100" algn="l">
               <a:lnSpc>
                 <a:spcPct val="103000"/>
               </a:lnSpc>
@@ -13917,7 +14151,7 @@
             </a:r>
           </a:p>
           <a:p>
-            <a:pPr algn="l" marL="355600" indent="-165100">
+            <a:pPr marL="355600" indent="-165100" algn="l">
               <a:lnSpc>
                 <a:spcPct val="103000"/>
               </a:lnSpc>
@@ -13951,7 +14185,7 @@
             </a:r>
           </a:p>
           <a:p>
-            <a:pPr algn="l" marL="190500" indent="-190500">
+            <a:pPr marL="190500" indent="-190500" algn="l">
               <a:lnSpc>
                 <a:spcPct val="103000"/>
               </a:lnSpc>
@@ -13985,7 +14219,7 @@
             </a:r>
           </a:p>
           <a:p>
-            <a:pPr algn="l" marL="355600" indent="-165100">
+            <a:pPr marL="355600" indent="-165100" algn="l">
               <a:lnSpc>
                 <a:spcPct val="103000"/>
               </a:lnSpc>
@@ -14032,7 +14266,7 @@
             </a:r>
           </a:p>
           <a:p>
-            <a:pPr algn="l" marL="355600" indent="-165100">
+            <a:pPr marL="355600" indent="-165100" algn="l">
               <a:lnSpc>
                 <a:spcPct val="103000"/>
               </a:lnSpc>
@@ -14094,7 +14328,7 @@
           <a:noFill/>
         </p:spPr>
         <p:txBody>
-          <a:bodyPr wrap="square" anchor="t" lIns="25400" rIns="25400" tIns="12700" bIns="12700">
+          <a:bodyPr wrap="square" lIns="25400" tIns="12700" rIns="25400" bIns="12700" anchor="t">
             <a:spAutoFit/>
           </a:bodyPr>
           <a:lstStyle/>
@@ -14160,7 +14394,7 @@
           <a:noFill/>
         </p:spPr>
         <p:txBody>
-          <a:bodyPr wrap="square" anchor="t" lIns="25400" rIns="25400" tIns="12700" bIns="12700">
+          <a:bodyPr wrap="square" lIns="25400" tIns="12700" rIns="25400" bIns="12700" anchor="t">
             <a:spAutoFit/>
           </a:bodyPr>
           <a:lstStyle/>
@@ -14234,6 +14468,7 @@
           <a:lstStyle/>
           <a:p>
             <a:pPr algn="ctr"/>
+            <a:endParaRPr/>
           </a:p>
         </p:txBody>
       </p:sp>
@@ -14254,7 +14489,7 @@
           <a:noFill/>
         </p:spPr>
         <p:txBody>
-          <a:bodyPr wrap="square" anchor="ctr" lIns="25400" rIns="25400" tIns="12700" bIns="12700">
+          <a:bodyPr wrap="square" lIns="25400" tIns="12700" rIns="25400" bIns="12700" anchor="ctr">
             <a:spAutoFit/>
           </a:bodyPr>
           <a:lstStyle/>
@@ -14349,6 +14584,7 @@
           <a:lstStyle/>
           <a:p>
             <a:pPr algn="ctr"/>
+            <a:endParaRPr/>
           </a:p>
         </p:txBody>
       </p:sp>
@@ -14369,7 +14605,7 @@
           <a:noFill/>
         </p:spPr>
         <p:txBody>
-          <a:bodyPr wrap="square" anchor="ctr" lIns="25400" rIns="25400" tIns="12700" bIns="12700">
+          <a:bodyPr wrap="square" lIns="25400" tIns="12700" rIns="25400" bIns="12700" anchor="ctr">
             <a:spAutoFit/>
           </a:bodyPr>
           <a:lstStyle/>
@@ -14438,7 +14674,7 @@
           <a:noFill/>
         </p:spPr>
         <p:txBody>
-          <a:bodyPr wrap="square" anchor="t" lIns="25400" rIns="25400" tIns="12700" bIns="12700">
+          <a:bodyPr wrap="square" lIns="25400" tIns="12700" rIns="25400" bIns="12700" anchor="t">
             <a:spAutoFit/>
           </a:bodyPr>
           <a:lstStyle/>
@@ -14512,6 +14748,7 @@
           <a:lstStyle/>
           <a:p>
             <a:pPr algn="ctr"/>
+            <a:endParaRPr/>
           </a:p>
         </p:txBody>
       </p:sp>
@@ -14532,7 +14769,7 @@
           <a:noFill/>
         </p:spPr>
         <p:txBody>
-          <a:bodyPr wrap="square" anchor="ctr" lIns="25400" rIns="25400" tIns="12700" bIns="12700">
+          <a:bodyPr wrap="square" lIns="25400" tIns="12700" rIns="25400" bIns="12700" anchor="ctr">
             <a:spAutoFit/>
           </a:bodyPr>
           <a:lstStyle/>
@@ -14629,6 +14866,7 @@
           <a:lstStyle/>
           <a:p>
             <a:pPr algn="ctr"/>
+            <a:endParaRPr/>
           </a:p>
         </p:txBody>
       </p:sp>
@@ -14649,7 +14887,7 @@
           <a:noFill/>
         </p:spPr>
         <p:txBody>
-          <a:bodyPr wrap="square" anchor="ctr" lIns="25400" rIns="25400" tIns="12700" bIns="12700">
+          <a:bodyPr wrap="square" lIns="25400" tIns="12700" rIns="25400" bIns="12700" anchor="ctr">
             <a:spAutoFit/>
           </a:bodyPr>
           <a:lstStyle/>
@@ -14746,6 +14984,7 @@
           <a:lstStyle/>
           <a:p>
             <a:pPr algn="ctr"/>
+            <a:endParaRPr/>
           </a:p>
         </p:txBody>
       </p:sp>
@@ -14766,7 +15005,7 @@
           <a:noFill/>
         </p:spPr>
         <p:txBody>
-          <a:bodyPr wrap="square" anchor="ctr" lIns="25400" rIns="25400" tIns="12700" bIns="12700">
+          <a:bodyPr wrap="square" lIns="25400" tIns="12700" rIns="25400" bIns="12700" anchor="ctr">
             <a:spAutoFit/>
           </a:bodyPr>
           <a:lstStyle/>
@@ -14835,7 +15074,7 @@
           <a:noFill/>
         </p:spPr>
         <p:txBody>
-          <a:bodyPr wrap="square" anchor="t" lIns="25400" rIns="25400" tIns="12700" bIns="12700">
+          <a:bodyPr wrap="square" lIns="25400" tIns="12700" rIns="25400" bIns="12700" anchor="t">
             <a:spAutoFit/>
           </a:bodyPr>
           <a:lstStyle/>
@@ -14929,6 +15168,7 @@
           <a:lstStyle/>
           <a:p>
             <a:pPr algn="ctr"/>
+            <a:endParaRPr/>
           </a:p>
         </p:txBody>
       </p:sp>
@@ -14949,7 +15189,7 @@
           <a:noFill/>
         </p:spPr>
         <p:txBody>
-          <a:bodyPr wrap="square" anchor="ctr" lIns="25400" rIns="25400" tIns="12700" bIns="12700">
+          <a:bodyPr wrap="square" lIns="25400" tIns="12700" rIns="25400" bIns="12700" anchor="ctr">
             <a:spAutoFit/>
           </a:bodyPr>
           <a:lstStyle/>
@@ -15005,7 +15245,7 @@
           <a:noFill/>
         </p:spPr>
         <p:txBody>
-          <a:bodyPr wrap="square" anchor="t" lIns="25400" rIns="25400" tIns="12700" bIns="12700">
+          <a:bodyPr wrap="square" lIns="25400" tIns="12700" rIns="25400" bIns="12700" anchor="t">
             <a:spAutoFit/>
           </a:bodyPr>
           <a:lstStyle/>
@@ -15079,6 +15319,7 @@
           <a:lstStyle/>
           <a:p>
             <a:pPr algn="ctr"/>
+            <a:endParaRPr/>
           </a:p>
         </p:txBody>
       </p:sp>
@@ -15099,7 +15340,7 @@
           <a:noFill/>
         </p:spPr>
         <p:txBody>
-          <a:bodyPr wrap="square" anchor="ctr" lIns="25400" rIns="25400" tIns="12700" bIns="12700">
+          <a:bodyPr wrap="square" lIns="25400" tIns="12700" rIns="25400" bIns="12700" anchor="ctr">
             <a:spAutoFit/>
           </a:bodyPr>
           <a:lstStyle/>
@@ -15168,12 +15409,12 @@
           <a:noFill/>
         </p:spPr>
         <p:txBody>
-          <a:bodyPr wrap="square" anchor="t" lIns="25400" rIns="25400" tIns="12700" bIns="12700">
+          <a:bodyPr wrap="square" lIns="25400" tIns="12700" rIns="25400" bIns="12700" anchor="t">
             <a:spAutoFit/>
           </a:bodyPr>
           <a:lstStyle/>
           <a:p>
-            <a:pPr algn="l" marL="190500" indent="-190500">
+            <a:pPr marL="190500" indent="-190500" algn="l">
               <a:lnSpc>
                 <a:spcPct val="103000"/>
               </a:lnSpc>
@@ -15207,7 +15448,7 @@
             </a:r>
           </a:p>
           <a:p>
-            <a:pPr algn="l" marL="355600" indent="-165100">
+            <a:pPr marL="355600" indent="-165100" algn="l">
               <a:lnSpc>
                 <a:spcPct val="103000"/>
               </a:lnSpc>
@@ -15251,7 +15492,7 @@
             </a:r>
           </a:p>
           <a:p>
-            <a:pPr algn="l" marL="355600" indent="-165100">
+            <a:pPr marL="355600" indent="-165100" algn="l">
               <a:lnSpc>
                 <a:spcPct val="103000"/>
               </a:lnSpc>
@@ -15318,9 +15559,27 @@
                 <a:tableStyleId>{5C22544A-7EE6-4342-B048-85BDC9FD1C3A}</a:tableStyleId>
               </a:tblPr>
               <a:tblGrid>
-                <a:gridCol w="2011680"/>
-                <a:gridCol w="914400"/>
-                <a:gridCol w="603504"/>
+                <a:gridCol w="2011680">
+                  <a:extLst>
+                    <a:ext uri="{9D8B030D-6E8A-4147-A177-3AD203B41FA5}">
+                      <a16:colId xmlns:a16="http://schemas.microsoft.com/office/drawing/2014/main" val="20000"/>
+                    </a:ext>
+                  </a:extLst>
+                </a:gridCol>
+                <a:gridCol w="914400">
+                  <a:extLst>
+                    <a:ext uri="{9D8B030D-6E8A-4147-A177-3AD203B41FA5}">
+                      <a16:colId xmlns:a16="http://schemas.microsoft.com/office/drawing/2014/main" val="20001"/>
+                    </a:ext>
+                  </a:extLst>
+                </a:gridCol>
+                <a:gridCol w="603504">
+                  <a:extLst>
+                    <a:ext uri="{9D8B030D-6E8A-4147-A177-3AD203B41FA5}">
+                      <a16:colId xmlns:a16="http://schemas.microsoft.com/office/drawing/2014/main" val="20002"/>
+                    </a:ext>
+                  </a:extLst>
+                </a:gridCol>
               </a:tblGrid>
               <a:tr h="301752">
                 <a:tc>
@@ -15341,7 +15600,7 @@
                       </a:r>
                     </a:p>
                   </a:txBody>
-                  <a:tcPr anchor="ctr" marL="50800" marR="50800" marT="12700" marB="12700">
+                  <a:tcPr marL="50800" marR="50800" marT="12700" marB="12700" anchor="ctr">
                     <a:solidFill>
                       <a:srgbClr val="1F3864"/>
                     </a:solidFill>
@@ -15365,7 +15624,7 @@
                       </a:r>
                     </a:p>
                   </a:txBody>
-                  <a:tcPr anchor="ctr" marL="50800" marR="50800" marT="12700" marB="12700">
+                  <a:tcPr marL="50800" marR="50800" marT="12700" marB="12700" anchor="ctr">
                     <a:solidFill>
                       <a:srgbClr val="1F3864"/>
                     </a:solidFill>
@@ -15389,12 +15648,17 @@
                       </a:r>
                     </a:p>
                   </a:txBody>
-                  <a:tcPr anchor="ctr" marL="50800" marR="50800" marT="12700" marB="12700">
+                  <a:tcPr marL="50800" marR="50800" marT="12700" marB="12700" anchor="ctr">
                     <a:solidFill>
                       <a:srgbClr val="1F3864"/>
                     </a:solidFill>
                   </a:tcPr>
                 </a:tc>
+                <a:extLst>
+                  <a:ext uri="{0D108BD9-81ED-4DB2-BD59-A6C34878D82A}">
+                    <a16:rowId xmlns:a16="http://schemas.microsoft.com/office/drawing/2014/main" val="10000"/>
+                  </a:ext>
+                </a:extLst>
               </a:tr>
               <a:tr h="301752">
                 <a:tc>
@@ -15415,7 +15679,7 @@
                       </a:r>
                     </a:p>
                   </a:txBody>
-                  <a:tcPr anchor="ctr" marL="50800" marR="50800" marT="12700" marB="12700">
+                  <a:tcPr marL="50800" marR="50800" marT="12700" marB="12700" anchor="ctr">
                     <a:solidFill>
                       <a:srgbClr val="FFFFFF"/>
                     </a:solidFill>
@@ -15439,7 +15703,7 @@
                       </a:r>
                     </a:p>
                   </a:txBody>
-                  <a:tcPr anchor="ctr" marL="50800" marR="50800" marT="12700" marB="12700">
+                  <a:tcPr marL="50800" marR="50800" marT="12700" marB="12700" anchor="ctr">
                     <a:solidFill>
                       <a:srgbClr val="FFFFFF"/>
                     </a:solidFill>
@@ -15463,12 +15727,17 @@
                       </a:r>
                     </a:p>
                   </a:txBody>
-                  <a:tcPr anchor="ctr" marL="50800" marR="50800" marT="12700" marB="12700">
+                  <a:tcPr marL="50800" marR="50800" marT="12700" marB="12700" anchor="ctr">
                     <a:solidFill>
                       <a:srgbClr val="FFFFFF"/>
                     </a:solidFill>
                   </a:tcPr>
                 </a:tc>
+                <a:extLst>
+                  <a:ext uri="{0D108BD9-81ED-4DB2-BD59-A6C34878D82A}">
+                    <a16:rowId xmlns:a16="http://schemas.microsoft.com/office/drawing/2014/main" val="10001"/>
+                  </a:ext>
+                </a:extLst>
               </a:tr>
               <a:tr h="301752">
                 <a:tc>
@@ -15489,7 +15758,7 @@
                       </a:r>
                     </a:p>
                   </a:txBody>
-                  <a:tcPr anchor="ctr" marL="50800" marR="50800" marT="12700" marB="12700">
+                  <a:tcPr marL="50800" marR="50800" marT="12700" marB="12700" anchor="ctr">
                     <a:solidFill>
                       <a:srgbClr val="FFFFFF"/>
                     </a:solidFill>
@@ -15513,7 +15782,7 @@
                       </a:r>
                     </a:p>
                   </a:txBody>
-                  <a:tcPr anchor="ctr" marL="50800" marR="50800" marT="12700" marB="12700">
+                  <a:tcPr marL="50800" marR="50800" marT="12700" marB="12700" anchor="ctr">
                     <a:solidFill>
                       <a:srgbClr val="FFFFFF"/>
                     </a:solidFill>
@@ -15537,12 +15806,17 @@
                       </a:r>
                     </a:p>
                   </a:txBody>
-                  <a:tcPr anchor="ctr" marL="50800" marR="50800" marT="12700" marB="12700">
+                  <a:tcPr marL="50800" marR="50800" marT="12700" marB="12700" anchor="ctr">
                     <a:solidFill>
                       <a:srgbClr val="FFFFFF"/>
                     </a:solidFill>
                   </a:tcPr>
                 </a:tc>
+                <a:extLst>
+                  <a:ext uri="{0D108BD9-81ED-4DB2-BD59-A6C34878D82A}">
+                    <a16:rowId xmlns:a16="http://schemas.microsoft.com/office/drawing/2014/main" val="10002"/>
+                  </a:ext>
+                </a:extLst>
               </a:tr>
               <a:tr h="301752">
                 <a:tc>
@@ -15563,7 +15837,7 @@
                       </a:r>
                     </a:p>
                   </a:txBody>
-                  <a:tcPr anchor="ctr" marL="50800" marR="50800" marT="12700" marB="12700">
+                  <a:tcPr marL="50800" marR="50800" marT="12700" marB="12700" anchor="ctr">
                     <a:solidFill>
                       <a:srgbClr val="FFFFFF"/>
                     </a:solidFill>
@@ -15587,7 +15861,7 @@
                       </a:r>
                     </a:p>
                   </a:txBody>
-                  <a:tcPr anchor="ctr" marL="50800" marR="50800" marT="12700" marB="12700">
+                  <a:tcPr marL="50800" marR="50800" marT="12700" marB="12700" anchor="ctr">
                     <a:solidFill>
                       <a:srgbClr val="FFFFFF"/>
                     </a:solidFill>
@@ -15611,12 +15885,17 @@
                       </a:r>
                     </a:p>
                   </a:txBody>
-                  <a:tcPr anchor="ctr" marL="50800" marR="50800" marT="12700" marB="12700">
+                  <a:tcPr marL="50800" marR="50800" marT="12700" marB="12700" anchor="ctr">
                     <a:solidFill>
                       <a:srgbClr val="FFFFFF"/>
                     </a:solidFill>
                   </a:tcPr>
                 </a:tc>
+                <a:extLst>
+                  <a:ext uri="{0D108BD9-81ED-4DB2-BD59-A6C34878D82A}">
+                    <a16:rowId xmlns:a16="http://schemas.microsoft.com/office/drawing/2014/main" val="10003"/>
+                  </a:ext>
+                </a:extLst>
               </a:tr>
               <a:tr h="301752">
                 <a:tc>
@@ -15637,7 +15916,7 @@
                       </a:r>
                     </a:p>
                   </a:txBody>
-                  <a:tcPr anchor="ctr" marL="50800" marR="50800" marT="12700" marB="12700">
+                  <a:tcPr marL="50800" marR="50800" marT="12700" marB="12700" anchor="ctr">
                     <a:solidFill>
                       <a:srgbClr val="E8F3EA"/>
                     </a:solidFill>
@@ -15649,19 +15928,10 @@
                     <a:lstStyle/>
                     <a:p>
                       <a:pPr algn="ctr"/>
-                      <a:r>
-                        <a:rPr sz="1100" b="1" i="0">
-                          <a:solidFill>
-                            <a:srgbClr val="202020"/>
-                          </a:solidFill>
-                          <a:latin typeface="맑은 고딕"/>
-                          <a:ea typeface="맑은 고딕"/>
-                        </a:rPr>
-                        <a:t/>
-                      </a:r>
+                      <a:endParaRPr/>
                     </a:p>
                   </a:txBody>
-                  <a:tcPr anchor="ctr" marL="50800" marR="50800" marT="12700" marB="12700">
+                  <a:tcPr marL="50800" marR="50800" marT="12700" marB="12700" anchor="ctr">
                     <a:solidFill>
                       <a:srgbClr val="E8F3EA"/>
                     </a:solidFill>
@@ -15685,12 +15955,17 @@
                       </a:r>
                     </a:p>
                   </a:txBody>
-                  <a:tcPr anchor="ctr" marL="50800" marR="50800" marT="12700" marB="12700">
+                  <a:tcPr marL="50800" marR="50800" marT="12700" marB="12700" anchor="ctr">
                     <a:solidFill>
                       <a:srgbClr val="E8F3EA"/>
                     </a:solidFill>
                   </a:tcPr>
                 </a:tc>
+                <a:extLst>
+                  <a:ext uri="{0D108BD9-81ED-4DB2-BD59-A6C34878D82A}">
+                    <a16:rowId xmlns:a16="http://schemas.microsoft.com/office/drawing/2014/main" val="10004"/>
+                  </a:ext>
+                </a:extLst>
               </a:tr>
             </a:tbl>
           </a:graphicData>
@@ -15713,7 +15988,7 @@
           <a:noFill/>
         </p:spPr>
         <p:txBody>
-          <a:bodyPr wrap="square" anchor="t" lIns="25400" rIns="25400" tIns="12700" bIns="12700">
+          <a:bodyPr wrap="square" lIns="25400" tIns="12700" rIns="25400" bIns="12700" anchor="t">
             <a:spAutoFit/>
           </a:bodyPr>
           <a:lstStyle/>
@@ -15779,7 +16054,7 @@
           <a:noFill/>
         </p:spPr>
         <p:txBody>
-          <a:bodyPr wrap="square" anchor="t" lIns="25400" rIns="25400" tIns="12700" bIns="12700">
+          <a:bodyPr wrap="square" lIns="25400" tIns="12700" rIns="25400" bIns="12700" anchor="t">
             <a:spAutoFit/>
           </a:bodyPr>
           <a:lstStyle/>
@@ -15853,6 +16128,7 @@
           <a:lstStyle/>
           <a:p>
             <a:pPr algn="ctr"/>
+            <a:endParaRPr/>
           </a:p>
         </p:txBody>
       </p:sp>
@@ -15873,7 +16149,7 @@
           <a:noFill/>
         </p:spPr>
         <p:txBody>
-          <a:bodyPr wrap="square" anchor="ctr" lIns="25400" rIns="25400" tIns="12700" bIns="12700">
+          <a:bodyPr wrap="square" lIns="25400" tIns="12700" rIns="25400" bIns="12700" anchor="ctr">
             <a:spAutoFit/>
           </a:bodyPr>
           <a:lstStyle/>
@@ -15968,6 +16244,7 @@
           <a:lstStyle/>
           <a:p>
             <a:pPr algn="ctr"/>
+            <a:endParaRPr/>
           </a:p>
         </p:txBody>
       </p:sp>
@@ -15988,7 +16265,7 @@
           <a:noFill/>
         </p:spPr>
         <p:txBody>
-          <a:bodyPr wrap="square" anchor="ctr" lIns="25400" rIns="25400" tIns="12700" bIns="12700">
+          <a:bodyPr wrap="square" lIns="25400" tIns="12700" rIns="25400" bIns="12700" anchor="ctr">
             <a:spAutoFit/>
           </a:bodyPr>
           <a:lstStyle/>
@@ -16084,7 +16361,7 @@
           <a:noFill/>
         </p:spPr>
         <p:txBody>
-          <a:bodyPr wrap="square" anchor="t" lIns="25400" rIns="25400" tIns="12700" bIns="12700">
+          <a:bodyPr wrap="square" lIns="25400" tIns="12700" rIns="25400" bIns="12700" anchor="t">
             <a:spAutoFit/>
           </a:bodyPr>
           <a:lstStyle/>
@@ -16110,6 +16387,1948 @@
               </a:rPr>
               <a:t>출처: Samsung Global Newsroom (Tizen 2억 대+); ElectroIQ Smart TV Statistics (2026); AndroidGuys CES 2026.</a:t>
             </a:r>
+          </a:p>
+        </p:txBody>
+      </p:sp>
+    </p:spTree>
+  </p:cSld>
+  <p:clrMapOvr>
+    <a:masterClrMapping/>
+  </p:clrMapOvr>
+</p:sld>
+</file>
+
+<file path=ppt/slides/slide4.xml><?xml version="1.0" encoding="utf-8"?>
+<p:sld xmlns:a="http://schemas.openxmlformats.org/drawingml/2006/main" xmlns:r="http://schemas.openxmlformats.org/officeDocument/2006/relationships" xmlns:p="http://schemas.openxmlformats.org/presentationml/2006/main">
+  <p:cSld>
+    <p:spTree>
+      <p:nvGrpSpPr>
+        <p:cNvPr id="1" name=""/>
+        <p:cNvGrpSpPr/>
+        <p:nvPr/>
+      </p:nvGrpSpPr>
+      <p:grpSpPr>
+        <a:xfrm>
+          <a:off x="0" y="0"/>
+          <a:ext cx="0" cy="0"/>
+          <a:chOff x="0" y="0"/>
+          <a:chExt cx="0" cy="0"/>
+        </a:xfrm>
+      </p:grpSpPr>
+      <p:sp>
+        <p:nvSpPr>
+          <p:cNvPr id="2" name="TextBox 1"/>
+          <p:cNvSpPr txBox="1"/>
+          <p:nvPr/>
+        </p:nvSpPr>
+        <p:spPr>
+          <a:xfrm>
+            <a:off x="411480" y="182880"/>
+            <a:ext cx="7772400" cy="566928"/>
+          </a:xfrm>
+          <a:prstGeom prst="rect">
+            <a:avLst/>
+          </a:prstGeom>
+          <a:noFill/>
+        </p:spPr>
+        <p:txBody>
+          <a:bodyPr wrap="square" lIns="25400" tIns="12700" rIns="25400" bIns="12700" anchor="ctr">
+            <a:spAutoFit/>
+          </a:bodyPr>
+          <a:lstStyle/>
+          <a:p>
+            <a:pPr algn="l">
+              <a:lnSpc>
+                <a:spcPct val="100000"/>
+              </a:lnSpc>
+              <a:spcBef>
+                <a:spcPts val="0"/>
+              </a:spcBef>
+              <a:spcAft>
+                <a:spcPts val="400"/>
+              </a:spcAft>
+            </a:pPr>
+            <a:r>
+              <a:rPr sz="2600" b="1" i="0">
+                <a:solidFill>
+                  <a:srgbClr val="202020"/>
+                </a:solidFill>
+                <a:latin typeface="맑은 고딕"/>
+                <a:ea typeface="맑은 고딕"/>
+              </a:rPr>
+              <a:t>과제 개요</a:t>
+            </a:r>
+            <a:r>
+              <a:rPr sz="2200" b="1" i="0">
+                <a:solidFill>
+                  <a:srgbClr val="7F7F7F"/>
+                </a:solidFill>
+                <a:latin typeface="맑은 고딕"/>
+                <a:ea typeface="맑은 고딕"/>
+              </a:rPr>
+              <a:t>  |  </a:t>
+            </a:r>
+            <a:r>
+              <a:rPr sz="2200" b="1" i="0">
+                <a:solidFill>
+                  <a:srgbClr val="595959"/>
+                </a:solidFill>
+                <a:latin typeface="맑은 고딕"/>
+                <a:ea typeface="맑은 고딕"/>
+              </a:rPr>
+              <a:t>Project Overview</a:t>
+            </a:r>
+          </a:p>
+        </p:txBody>
+      </p:sp>
+      <p:sp>
+        <p:nvSpPr>
+          <p:cNvPr id="3" name="Rectangle 2"/>
+          <p:cNvSpPr/>
+          <p:nvPr/>
+        </p:nvSpPr>
+        <p:spPr>
+          <a:xfrm>
+            <a:off x="411480" y="822960"/>
+            <a:ext cx="11384280" cy="40640"/>
+          </a:xfrm>
+          <a:prstGeom prst="rect">
+            <a:avLst/>
+          </a:prstGeom>
+          <a:solidFill>
+            <a:srgbClr val="7F7F7F"/>
+          </a:solidFill>
+          <a:ln>
+            <a:noFill/>
+          </a:ln>
+          <a:effectLst/>
+        </p:spPr>
+        <p:style>
+          <a:lnRef idx="1">
+            <a:schemeClr val="accent1"/>
+          </a:lnRef>
+          <a:fillRef idx="3">
+            <a:schemeClr val="accent1"/>
+          </a:fillRef>
+          <a:effectRef idx="2">
+            <a:schemeClr val="accent1"/>
+          </a:effectRef>
+          <a:fontRef idx="minor">
+            <a:schemeClr val="lt1"/>
+          </a:fontRef>
+        </p:style>
+        <p:txBody>
+          <a:bodyPr rtlCol="0" anchor="ctr"/>
+          <a:lstStyle/>
+          <a:p>
+            <a:pPr algn="ctr"/>
+            <a:endParaRPr/>
+          </a:p>
+        </p:txBody>
+      </p:sp>
+      <p:sp>
+        <p:nvSpPr>
+          <p:cNvPr id="4" name="Pentagon 3"/>
+          <p:cNvSpPr/>
+          <p:nvPr/>
+        </p:nvSpPr>
+        <p:spPr>
+          <a:xfrm>
+            <a:off x="7244791" y="274320"/>
+            <a:ext cx="1024128" cy="310896"/>
+          </a:xfrm>
+          <a:prstGeom prst="homePlate">
+            <a:avLst>
+              <a:gd name="adj" fmla="val 50000"/>
+            </a:avLst>
+          </a:prstGeom>
+          <a:solidFill>
+            <a:srgbClr val="4FA9C4"/>
+          </a:solidFill>
+          <a:ln>
+            <a:noFill/>
+          </a:ln>
+          <a:effectLst/>
+        </p:spPr>
+        <p:style>
+          <a:lnRef idx="1">
+            <a:schemeClr val="accent1"/>
+          </a:lnRef>
+          <a:fillRef idx="3">
+            <a:schemeClr val="accent1"/>
+          </a:fillRef>
+          <a:effectRef idx="2">
+            <a:schemeClr val="accent1"/>
+          </a:effectRef>
+          <a:fontRef idx="minor">
+            <a:schemeClr val="lt1"/>
+          </a:fontRef>
+        </p:style>
+        <p:txBody>
+          <a:bodyPr wrap="none" lIns="12700" tIns="0" rIns="12700" bIns="0" rtlCol="0" anchor="ctr"/>
+          <a:lstStyle/>
+          <a:p>
+            <a:pPr algn="ctr"/>
+            <a:r>
+              <a:rPr sz="900" b="1" i="0">
+                <a:solidFill>
+                  <a:srgbClr val="FFFFFF"/>
+                </a:solidFill>
+                <a:latin typeface="맑은 고딕"/>
+                <a:ea typeface="맑은 고딕"/>
+              </a:rPr>
+              <a:t>과제 소개</a:t>
+            </a:r>
+          </a:p>
+        </p:txBody>
+      </p:sp>
+      <p:sp>
+        <p:nvSpPr>
+          <p:cNvPr id="5" name="Chevron 4"/>
+          <p:cNvSpPr/>
+          <p:nvPr/>
+        </p:nvSpPr>
+        <p:spPr>
+          <a:xfrm>
+            <a:off x="8122615" y="274320"/>
+            <a:ext cx="1024128" cy="310896"/>
+          </a:xfrm>
+          <a:prstGeom prst="chevron">
+            <a:avLst>
+              <a:gd name="adj" fmla="val 50000"/>
+            </a:avLst>
+          </a:prstGeom>
+          <a:solidFill>
+            <a:srgbClr val="7F7F7F"/>
+          </a:solidFill>
+          <a:ln>
+            <a:noFill/>
+          </a:ln>
+          <a:effectLst/>
+        </p:spPr>
+        <p:style>
+          <a:lnRef idx="1">
+            <a:schemeClr val="accent1"/>
+          </a:lnRef>
+          <a:fillRef idx="3">
+            <a:schemeClr val="accent1"/>
+          </a:fillRef>
+          <a:effectRef idx="2">
+            <a:schemeClr val="accent1"/>
+          </a:effectRef>
+          <a:fontRef idx="minor">
+            <a:schemeClr val="lt1"/>
+          </a:fontRef>
+        </p:style>
+        <p:txBody>
+          <a:bodyPr wrap="none" lIns="12700" tIns="0" rIns="12700" bIns="0" rtlCol="0" anchor="ctr"/>
+          <a:lstStyle/>
+          <a:p>
+            <a:pPr algn="ctr"/>
+            <a:r>
+              <a:rPr sz="900" b="1" i="0">
+                <a:solidFill>
+                  <a:srgbClr val="FFFFFF"/>
+                </a:solidFill>
+                <a:latin typeface="맑은 고딕"/>
+                <a:ea typeface="맑은 고딕"/>
+              </a:rPr>
+              <a:t>요구사항 분석</a:t>
+            </a:r>
+          </a:p>
+        </p:txBody>
+      </p:sp>
+      <p:sp>
+        <p:nvSpPr>
+          <p:cNvPr id="6" name="Chevron 5"/>
+          <p:cNvSpPr/>
+          <p:nvPr/>
+        </p:nvSpPr>
+        <p:spPr>
+          <a:xfrm>
+            <a:off x="9000439" y="274320"/>
+            <a:ext cx="1024128" cy="310896"/>
+          </a:xfrm>
+          <a:prstGeom prst="chevron">
+            <a:avLst>
+              <a:gd name="adj" fmla="val 50000"/>
+            </a:avLst>
+          </a:prstGeom>
+          <a:solidFill>
+            <a:srgbClr val="7F7F7F"/>
+          </a:solidFill>
+          <a:ln>
+            <a:noFill/>
+          </a:ln>
+          <a:effectLst/>
+        </p:spPr>
+        <p:style>
+          <a:lnRef idx="1">
+            <a:schemeClr val="accent1"/>
+          </a:lnRef>
+          <a:fillRef idx="3">
+            <a:schemeClr val="accent1"/>
+          </a:fillRef>
+          <a:effectRef idx="2">
+            <a:schemeClr val="accent1"/>
+          </a:effectRef>
+          <a:fontRef idx="minor">
+            <a:schemeClr val="lt1"/>
+          </a:fontRef>
+        </p:style>
+        <p:txBody>
+          <a:bodyPr wrap="none" lIns="12700" tIns="0" rIns="12700" bIns="0" rtlCol="0" anchor="ctr"/>
+          <a:lstStyle/>
+          <a:p>
+            <a:pPr algn="ctr"/>
+            <a:r>
+              <a:rPr sz="900" b="1" i="0">
+                <a:solidFill>
+                  <a:srgbClr val="FFFFFF"/>
+                </a:solidFill>
+                <a:latin typeface="맑은 고딕"/>
+                <a:ea typeface="맑은 고딕"/>
+              </a:rPr>
+              <a:t>설계</a:t>
+            </a:r>
+          </a:p>
+        </p:txBody>
+      </p:sp>
+      <p:sp>
+        <p:nvSpPr>
+          <p:cNvPr id="7" name="Chevron 6"/>
+          <p:cNvSpPr/>
+          <p:nvPr/>
+        </p:nvSpPr>
+        <p:spPr>
+          <a:xfrm>
+            <a:off x="9878263" y="274320"/>
+            <a:ext cx="1024128" cy="310896"/>
+          </a:xfrm>
+          <a:prstGeom prst="chevron">
+            <a:avLst>
+              <a:gd name="adj" fmla="val 50000"/>
+            </a:avLst>
+          </a:prstGeom>
+          <a:solidFill>
+            <a:srgbClr val="7F7F7F"/>
+          </a:solidFill>
+          <a:ln>
+            <a:noFill/>
+          </a:ln>
+          <a:effectLst/>
+        </p:spPr>
+        <p:style>
+          <a:lnRef idx="1">
+            <a:schemeClr val="accent1"/>
+          </a:lnRef>
+          <a:fillRef idx="3">
+            <a:schemeClr val="accent1"/>
+          </a:fillRef>
+          <a:effectRef idx="2">
+            <a:schemeClr val="accent1"/>
+          </a:effectRef>
+          <a:fontRef idx="minor">
+            <a:schemeClr val="lt1"/>
+          </a:fontRef>
+        </p:style>
+        <p:txBody>
+          <a:bodyPr wrap="none" lIns="12700" tIns="0" rIns="12700" bIns="0" rtlCol="0" anchor="ctr"/>
+          <a:lstStyle/>
+          <a:p>
+            <a:pPr algn="ctr"/>
+            <a:r>
+              <a:rPr sz="900" b="1" i="0">
+                <a:solidFill>
+                  <a:srgbClr val="FFFFFF"/>
+                </a:solidFill>
+                <a:latin typeface="맑은 고딕"/>
+                <a:ea typeface="맑은 고딕"/>
+              </a:rPr>
+              <a:t>구현 및 검증</a:t>
+            </a:r>
+          </a:p>
+        </p:txBody>
+      </p:sp>
+      <p:sp>
+        <p:nvSpPr>
+          <p:cNvPr id="8" name="Chevron 7"/>
+          <p:cNvSpPr/>
+          <p:nvPr/>
+        </p:nvSpPr>
+        <p:spPr>
+          <a:xfrm>
+            <a:off x="10756087" y="274320"/>
+            <a:ext cx="1024128" cy="310896"/>
+          </a:xfrm>
+          <a:prstGeom prst="chevron">
+            <a:avLst>
+              <a:gd name="adj" fmla="val 50000"/>
+            </a:avLst>
+          </a:prstGeom>
+          <a:solidFill>
+            <a:srgbClr val="7F7F7F"/>
+          </a:solidFill>
+          <a:ln>
+            <a:noFill/>
+          </a:ln>
+          <a:effectLst/>
+        </p:spPr>
+        <p:style>
+          <a:lnRef idx="1">
+            <a:schemeClr val="accent1"/>
+          </a:lnRef>
+          <a:fillRef idx="3">
+            <a:schemeClr val="accent1"/>
+          </a:fillRef>
+          <a:effectRef idx="2">
+            <a:schemeClr val="accent1"/>
+          </a:effectRef>
+          <a:fontRef idx="minor">
+            <a:schemeClr val="lt1"/>
+          </a:fontRef>
+        </p:style>
+        <p:txBody>
+          <a:bodyPr wrap="none" lIns="12700" tIns="0" rIns="12700" bIns="0" rtlCol="0" anchor="ctr"/>
+          <a:lstStyle/>
+          <a:p>
+            <a:pPr algn="ctr"/>
+            <a:r>
+              <a:rPr sz="900" b="1" i="0">
+                <a:solidFill>
+                  <a:srgbClr val="FFFFFF"/>
+                </a:solidFill>
+                <a:latin typeface="맑은 고딕"/>
+                <a:ea typeface="맑은 고딕"/>
+              </a:rPr>
+              <a:t>결론</a:t>
+            </a:r>
+          </a:p>
+        </p:txBody>
+      </p:sp>
+      <p:graphicFrame>
+        <p:nvGraphicFramePr>
+          <p:cNvPr id="9" name="Table 8"/>
+          <p:cNvGraphicFramePr>
+            <a:graphicFrameLocks noGrp="1"/>
+          </p:cNvGraphicFramePr>
+          <p:nvPr>
+            <p:extLst>
+              <p:ext uri="{D42A27DB-BD31-4B8C-83A1-F6EECF244321}">
+                <p14:modId xmlns:p14="http://schemas.microsoft.com/office/powerpoint/2010/main" val="4225097766"/>
+              </p:ext>
+            </p:extLst>
+          </p:nvPr>
+        </p:nvGraphicFramePr>
+        <p:xfrm>
+          <a:off x="640080" y="1417320"/>
+          <a:ext cx="10908792" cy="4446080"/>
+        </p:xfrm>
+        <a:graphic>
+          <a:graphicData uri="http://schemas.openxmlformats.org/drawingml/2006/table">
+            <a:tbl>
+              <a:tblPr>
+                <a:tableStyleId>{5C22544A-7EE6-4342-B048-85BDC9FD1C3A}</a:tableStyleId>
+              </a:tblPr>
+              <a:tblGrid>
+                <a:gridCol w="2286000">
+                  <a:extLst>
+                    <a:ext uri="{9D8B030D-6E8A-4147-A177-3AD203B41FA5}">
+                      <a16:colId xmlns:a16="http://schemas.microsoft.com/office/drawing/2014/main" val="20000"/>
+                    </a:ext>
+                  </a:extLst>
+                </a:gridCol>
+                <a:gridCol w="8622792">
+                  <a:extLst>
+                    <a:ext uri="{9D8B030D-6E8A-4147-A177-3AD203B41FA5}">
+                      <a16:colId xmlns:a16="http://schemas.microsoft.com/office/drawing/2014/main" val="20001"/>
+                    </a:ext>
+                  </a:extLst>
+                </a:gridCol>
+              </a:tblGrid>
+              <a:tr h="502920">
+                <a:tc>
+                  <a:txBody>
+                    <a:bodyPr/>
+                    <a:lstStyle/>
+                    <a:p>
+                      <a:pPr algn="l"/>
+                      <a:r>
+                        <a:rPr sz="1250" b="1" i="0">
+                          <a:solidFill>
+                            <a:srgbClr val="FFFFFF"/>
+                          </a:solidFill>
+                          <a:latin typeface="맑은 고딕"/>
+                          <a:ea typeface="맑은 고딕"/>
+                        </a:rPr>
+                        <a:t>과제명</a:t>
+                      </a:r>
+                    </a:p>
+                  </a:txBody>
+                  <a:tcPr marL="152400" marR="50800" marT="25400" marB="25400" anchor="ctr">
+                    <a:solidFill>
+                      <a:srgbClr val="1F3864"/>
+                    </a:solidFill>
+                  </a:tcPr>
+                </a:tc>
+                <a:tc>
+                  <a:txBody>
+                    <a:bodyPr/>
+                    <a:lstStyle/>
+                    <a:p>
+                      <a:pPr algn="l">
+                        <a:lnSpc>
+                          <a:spcPct val="106000"/>
+                        </a:lnSpc>
+                        <a:spcBef>
+                          <a:spcPts val="0"/>
+                        </a:spcBef>
+                        <a:spcAft>
+                          <a:spcPts val="200"/>
+                        </a:spcAft>
+                      </a:pPr>
+                      <a:r>
+                        <a:rPr sz="1350" b="1" i="0">
+                          <a:solidFill>
+                            <a:srgbClr val="1F3864"/>
+                          </a:solidFill>
+                          <a:latin typeface="맑은 고딕"/>
+                          <a:ea typeface="맑은 고딕"/>
+                        </a:rPr>
+                        <a:t>Tizen TV AI Web Agent (AI Browser)</a:t>
+                      </a:r>
+                    </a:p>
+                  </a:txBody>
+                  <a:tcPr marL="152400" marR="101600" marT="50800" marB="50800" anchor="ctr">
+                    <a:solidFill>
+                      <a:srgbClr val="FFFFFF"/>
+                    </a:solidFill>
+                  </a:tcPr>
+                </a:tc>
+                <a:extLst>
+                  <a:ext uri="{0D108BD9-81ED-4DB2-BD59-A6C34878D82A}">
+                    <a16:rowId xmlns:a16="http://schemas.microsoft.com/office/drawing/2014/main" val="10000"/>
+                  </a:ext>
+                </a:extLst>
+              </a:tr>
+              <a:tr h="457200">
+                <a:tc>
+                  <a:txBody>
+                    <a:bodyPr/>
+                    <a:lstStyle/>
+                    <a:p>
+                      <a:pPr algn="l"/>
+                      <a:r>
+                        <a:rPr sz="1250" b="1" i="0">
+                          <a:solidFill>
+                            <a:srgbClr val="FFFFFF"/>
+                          </a:solidFill>
+                          <a:latin typeface="맑은 고딕"/>
+                          <a:ea typeface="맑은 고딕"/>
+                        </a:rPr>
+                        <a:t>과제 유형</a:t>
+                      </a:r>
+                    </a:p>
+                  </a:txBody>
+                  <a:tcPr marL="152400" marR="50800" marT="25400" marB="25400" anchor="ctr">
+                    <a:solidFill>
+                      <a:srgbClr val="1F3864"/>
+                    </a:solidFill>
+                  </a:tcPr>
+                </a:tc>
+                <a:tc>
+                  <a:txBody>
+                    <a:bodyPr/>
+                    <a:lstStyle/>
+                    <a:p>
+                      <a:pPr algn="l">
+                        <a:lnSpc>
+                          <a:spcPct val="106000"/>
+                        </a:lnSpc>
+                        <a:spcBef>
+                          <a:spcPts val="0"/>
+                        </a:spcBef>
+                        <a:spcAft>
+                          <a:spcPts val="200"/>
+                        </a:spcAft>
+                      </a:pPr>
+                      <a:r>
+                        <a:rPr sz="1150" b="1" i="0" dirty="0" err="1">
+                          <a:solidFill>
+                            <a:srgbClr val="202020"/>
+                          </a:solidFill>
+                          <a:latin typeface="맑은 고딕"/>
+                          <a:ea typeface="맑은 고딕"/>
+                        </a:rPr>
+                        <a:t>신규</a:t>
+                      </a:r>
+                      <a:r>
+                        <a:rPr sz="1150" b="1" i="0" dirty="0">
+                          <a:solidFill>
+                            <a:srgbClr val="202020"/>
+                          </a:solidFill>
+                          <a:latin typeface="맑은 고딕"/>
+                          <a:ea typeface="맑은 고딕"/>
+                        </a:rPr>
+                        <a:t> </a:t>
+                      </a:r>
+                      <a:r>
+                        <a:rPr sz="1150" b="1" i="0" dirty="0" err="1">
+                          <a:solidFill>
+                            <a:srgbClr val="202020"/>
+                          </a:solidFill>
+                          <a:latin typeface="맑은 고딕"/>
+                          <a:ea typeface="맑은 고딕"/>
+                        </a:rPr>
+                        <a:t>플랫폼</a:t>
+                      </a:r>
+                      <a:r>
+                        <a:rPr sz="1150" b="1" i="0" dirty="0">
+                          <a:solidFill>
+                            <a:srgbClr val="202020"/>
+                          </a:solidFill>
+                          <a:latin typeface="맑은 고딕"/>
+                          <a:ea typeface="맑은 고딕"/>
+                        </a:rPr>
+                        <a:t> </a:t>
+                      </a:r>
+                      <a:r>
+                        <a:rPr sz="1150" b="1" i="0" dirty="0" err="1">
+                          <a:solidFill>
+                            <a:srgbClr val="202020"/>
+                          </a:solidFill>
+                          <a:latin typeface="맑은 고딕"/>
+                          <a:ea typeface="맑은 고딕"/>
+                        </a:rPr>
+                        <a:t>기능</a:t>
+                      </a:r>
+                      <a:r>
+                        <a:rPr sz="1150" b="1" i="0" dirty="0">
+                          <a:solidFill>
+                            <a:srgbClr val="202020"/>
+                          </a:solidFill>
+                          <a:latin typeface="맑은 고딕"/>
+                          <a:ea typeface="맑은 고딕"/>
+                        </a:rPr>
+                        <a:t> </a:t>
+                      </a:r>
+                      <a:r>
+                        <a:rPr sz="1150" b="1" i="0" dirty="0" err="1">
+                          <a:solidFill>
+                            <a:srgbClr val="202020"/>
+                          </a:solidFill>
+                          <a:latin typeface="맑은 고딕"/>
+                          <a:ea typeface="맑은 고딕"/>
+                        </a:rPr>
+                        <a:t>설계</a:t>
+                      </a:r>
+                      <a:r>
+                        <a:rPr sz="1150" b="1" i="0" dirty="0">
+                          <a:solidFill>
+                            <a:srgbClr val="202020"/>
+                          </a:solidFill>
+                          <a:latin typeface="맑은 고딕"/>
+                          <a:ea typeface="맑은 고딕"/>
+                        </a:rPr>
+                        <a:t> · </a:t>
+                      </a:r>
+                      <a:r>
+                        <a:rPr sz="1150" b="1" i="0" dirty="0" err="1">
+                          <a:solidFill>
+                            <a:srgbClr val="202020"/>
+                          </a:solidFill>
+                          <a:latin typeface="맑은 고딕"/>
+                          <a:ea typeface="맑은 고딕"/>
+                        </a:rPr>
+                        <a:t>아키텍처</a:t>
+                      </a:r>
+                      <a:r>
+                        <a:rPr sz="1150" b="1" i="0" dirty="0">
+                          <a:solidFill>
+                            <a:srgbClr val="202020"/>
+                          </a:solidFill>
+                          <a:latin typeface="맑은 고딕"/>
+                          <a:ea typeface="맑은 고딕"/>
+                        </a:rPr>
+                        <a:t> </a:t>
+                      </a:r>
+                      <a:r>
+                        <a:rPr sz="1150" b="1" i="0" dirty="0" err="1">
+                          <a:solidFill>
+                            <a:srgbClr val="202020"/>
+                          </a:solidFill>
+                          <a:latin typeface="맑은 고딕"/>
+                          <a:ea typeface="맑은 고딕"/>
+                        </a:rPr>
+                        <a:t>설계</a:t>
+                      </a:r>
+                      <a:r>
+                        <a:rPr sz="1150" b="1" i="0" dirty="0">
+                          <a:solidFill>
+                            <a:srgbClr val="202020"/>
+                          </a:solidFill>
+                          <a:latin typeface="맑은 고딕"/>
+                          <a:ea typeface="맑은 고딕"/>
+                        </a:rPr>
+                        <a:t> </a:t>
+                      </a:r>
+                      <a:r>
+                        <a:rPr sz="1150" b="1" i="0" dirty="0" err="1">
+                          <a:solidFill>
+                            <a:srgbClr val="202020"/>
+                          </a:solidFill>
+                          <a:latin typeface="맑은 고딕"/>
+                          <a:ea typeface="맑은 고딕"/>
+                        </a:rPr>
+                        <a:t>문서화</a:t>
+                      </a:r>
+                      <a:r>
+                        <a:rPr sz="1150" b="1" i="0" dirty="0">
+                          <a:solidFill>
+                            <a:srgbClr val="202020"/>
+                          </a:solidFill>
+                          <a:latin typeface="맑은 고딕"/>
+                          <a:ea typeface="맑은 고딕"/>
+                        </a:rPr>
+                        <a:t>(ADS)</a:t>
+                      </a:r>
+                    </a:p>
+                  </a:txBody>
+                  <a:tcPr marL="152400" marR="101600" marT="50800" marB="50800" anchor="ctr">
+                    <a:solidFill>
+                      <a:srgbClr val="FFFFFF"/>
+                    </a:solidFill>
+                  </a:tcPr>
+                </a:tc>
+                <a:extLst>
+                  <a:ext uri="{0D108BD9-81ED-4DB2-BD59-A6C34878D82A}">
+                    <a16:rowId xmlns:a16="http://schemas.microsoft.com/office/drawing/2014/main" val="10001"/>
+                  </a:ext>
+                </a:extLst>
+              </a:tr>
+              <a:tr h="502920">
+                <a:tc>
+                  <a:txBody>
+                    <a:bodyPr/>
+                    <a:lstStyle/>
+                    <a:p>
+                      <a:pPr algn="l"/>
+                      <a:r>
+                        <a:rPr sz="1250" b="1" i="0">
+                          <a:solidFill>
+                            <a:srgbClr val="FFFFFF"/>
+                          </a:solidFill>
+                          <a:latin typeface="맑은 고딕"/>
+                          <a:ea typeface="맑은 고딕"/>
+                        </a:rPr>
+                        <a:t>대상 플랫폼</a:t>
+                      </a:r>
+                    </a:p>
+                  </a:txBody>
+                  <a:tcPr marL="152400" marR="50800" marT="25400" marB="25400" anchor="ctr">
+                    <a:solidFill>
+                      <a:srgbClr val="1F3864"/>
+                    </a:solidFill>
+                  </a:tcPr>
+                </a:tc>
+                <a:tc>
+                  <a:txBody>
+                    <a:bodyPr/>
+                    <a:lstStyle/>
+                    <a:p>
+                      <a:pPr algn="l">
+                        <a:lnSpc>
+                          <a:spcPct val="106000"/>
+                        </a:lnSpc>
+                        <a:spcBef>
+                          <a:spcPts val="0"/>
+                        </a:spcBef>
+                        <a:spcAft>
+                          <a:spcPts val="200"/>
+                        </a:spcAft>
+                      </a:pPr>
+                      <a:r>
+                        <a:rPr sz="1200" b="1" i="0" dirty="0">
+                          <a:solidFill>
+                            <a:srgbClr val="202020"/>
+                          </a:solidFill>
+                          <a:latin typeface="맑은 고딕"/>
+                          <a:ea typeface="맑은 고딕"/>
+                        </a:rPr>
+                        <a:t>Samsung Tizen TV</a:t>
+                      </a:r>
+                      <a:endParaRPr sz="1050" b="0" i="0" dirty="0">
+                        <a:solidFill>
+                          <a:srgbClr val="595959"/>
+                        </a:solidFill>
+                        <a:latin typeface="맑은 고딕"/>
+                        <a:ea typeface="맑은 고딕"/>
+                      </a:endParaRPr>
+                    </a:p>
+                  </a:txBody>
+                  <a:tcPr marL="152400" marR="101600" marT="50800" marB="50800" anchor="ctr">
+                    <a:solidFill>
+                      <a:srgbClr val="FFFFFF"/>
+                    </a:solidFill>
+                  </a:tcPr>
+                </a:tc>
+                <a:extLst>
+                  <a:ext uri="{0D108BD9-81ED-4DB2-BD59-A6C34878D82A}">
+                    <a16:rowId xmlns:a16="http://schemas.microsoft.com/office/drawing/2014/main" val="10002"/>
+                  </a:ext>
+                </a:extLst>
+              </a:tr>
+              <a:tr h="1143000">
+                <a:tc>
+                  <a:txBody>
+                    <a:bodyPr/>
+                    <a:lstStyle/>
+                    <a:p>
+                      <a:pPr algn="l"/>
+                      <a:r>
+                        <a:rPr sz="1250" b="1" i="0">
+                          <a:solidFill>
+                            <a:srgbClr val="FFFFFF"/>
+                          </a:solidFill>
+                          <a:latin typeface="맑은 고딕"/>
+                          <a:ea typeface="맑은 고딕"/>
+                        </a:rPr>
+                        <a:t>과제 목표</a:t>
+                      </a:r>
+                    </a:p>
+                  </a:txBody>
+                  <a:tcPr marL="152400" marR="50800" marT="25400" marB="25400" anchor="ctr">
+                    <a:solidFill>
+                      <a:srgbClr val="1F3864"/>
+                    </a:solidFill>
+                  </a:tcPr>
+                </a:tc>
+                <a:tc>
+                  <a:txBody>
+                    <a:bodyPr/>
+                    <a:lstStyle/>
+                    <a:p>
+                      <a:pPr algn="l">
+                        <a:lnSpc>
+                          <a:spcPct val="106000"/>
+                        </a:lnSpc>
+                        <a:spcBef>
+                          <a:spcPts val="0"/>
+                        </a:spcBef>
+                        <a:spcAft>
+                          <a:spcPts val="200"/>
+                        </a:spcAft>
+                      </a:pPr>
+                      <a:r>
+                        <a:rPr sz="1200" b="1" i="0" dirty="0">
+                          <a:solidFill>
+                            <a:srgbClr val="202020"/>
+                          </a:solidFill>
+                          <a:latin typeface="맑은 고딕"/>
+                          <a:ea typeface="맑은 고딕"/>
+                        </a:rPr>
+                        <a:t>On-Device </a:t>
+                      </a:r>
+                      <a:r>
+                        <a:rPr sz="1200" b="1" i="0" dirty="0" err="1">
+                          <a:solidFill>
+                            <a:srgbClr val="202020"/>
+                          </a:solidFill>
+                          <a:latin typeface="맑은 고딕"/>
+                          <a:ea typeface="맑은 고딕"/>
+                        </a:rPr>
+                        <a:t>하네스</a:t>
+                      </a:r>
+                      <a:r>
+                        <a:rPr sz="1200" b="1" i="0" dirty="0">
+                          <a:solidFill>
+                            <a:srgbClr val="202020"/>
+                          </a:solidFill>
+                          <a:latin typeface="맑은 고딕"/>
+                          <a:ea typeface="맑은 고딕"/>
+                        </a:rPr>
+                        <a:t> </a:t>
+                      </a:r>
+                      <a:r>
+                        <a:rPr sz="1200" b="1" i="0" dirty="0" err="1">
+                          <a:solidFill>
+                            <a:srgbClr val="202020"/>
+                          </a:solidFill>
+                          <a:latin typeface="맑은 고딕"/>
+                          <a:ea typeface="맑은 고딕"/>
+                        </a:rPr>
+                        <a:t>기반</a:t>
+                      </a:r>
+                      <a:r>
+                        <a:rPr sz="1200" b="1" i="0" dirty="0">
+                          <a:solidFill>
+                            <a:srgbClr val="202020"/>
+                          </a:solidFill>
+                          <a:latin typeface="맑은 고딕"/>
+                          <a:ea typeface="맑은 고딕"/>
+                        </a:rPr>
+                        <a:t> AI Web Agent </a:t>
+                      </a:r>
+                      <a:r>
+                        <a:rPr sz="1200" b="1" i="0" dirty="0" err="1">
+                          <a:solidFill>
+                            <a:srgbClr val="202020"/>
+                          </a:solidFill>
+                          <a:latin typeface="맑은 고딕"/>
+                          <a:ea typeface="맑은 고딕"/>
+                        </a:rPr>
+                        <a:t>설계</a:t>
+                      </a:r>
+                      <a:endParaRPr sz="950" b="1" i="0" dirty="0">
+                        <a:solidFill>
+                          <a:srgbClr val="595959"/>
+                        </a:solidFill>
+                        <a:latin typeface="맑은 고딕"/>
+                        <a:ea typeface="맑은 고딕"/>
+                      </a:endParaRPr>
+                    </a:p>
+                    <a:p>
+                      <a:pPr marL="171450" indent="-171450" algn="l">
+                        <a:lnSpc>
+                          <a:spcPct val="106000"/>
+                        </a:lnSpc>
+                        <a:spcBef>
+                          <a:spcPts val="0"/>
+                        </a:spcBef>
+                        <a:spcAft>
+                          <a:spcPts val="200"/>
+                        </a:spcAft>
+                        <a:buFont typeface="Arial" panose="020B0604020202020204" pitchFamily="34" charset="0"/>
+                        <a:buChar char="•"/>
+                      </a:pPr>
+                      <a:r>
+                        <a:rPr sz="1100" b="1" i="0" dirty="0" err="1">
+                          <a:solidFill>
+                            <a:srgbClr val="202020"/>
+                          </a:solidFill>
+                          <a:latin typeface="맑은 고딕"/>
+                          <a:ea typeface="맑은 고딕"/>
+                        </a:rPr>
+                        <a:t>음성·자연어로</a:t>
+                      </a:r>
+                      <a:r>
+                        <a:rPr sz="1100" b="1" i="0" dirty="0">
+                          <a:solidFill>
+                            <a:srgbClr val="202020"/>
+                          </a:solidFill>
+                          <a:latin typeface="맑은 고딕"/>
+                          <a:ea typeface="맑은 고딕"/>
+                        </a:rPr>
+                        <a:t> </a:t>
+                      </a:r>
+                      <a:r>
+                        <a:rPr sz="1100" b="1" i="0" dirty="0" err="1">
+                          <a:solidFill>
+                            <a:srgbClr val="202020"/>
+                          </a:solidFill>
+                          <a:latin typeface="맑은 고딕"/>
+                          <a:ea typeface="맑은 고딕"/>
+                        </a:rPr>
+                        <a:t>위임하면</a:t>
+                      </a:r>
+                      <a:r>
+                        <a:rPr sz="1100" b="1" i="0" dirty="0">
+                          <a:solidFill>
+                            <a:srgbClr val="202020"/>
+                          </a:solidFill>
+                          <a:latin typeface="맑은 고딕"/>
+                          <a:ea typeface="맑은 고딕"/>
+                        </a:rPr>
+                        <a:t> </a:t>
+                      </a:r>
+                      <a:r>
+                        <a:rPr sz="1100" b="1" i="0" dirty="0" err="1">
+                          <a:solidFill>
+                            <a:srgbClr val="202020"/>
+                          </a:solidFill>
+                          <a:highlight>
+                            <a:srgbClr val="C6EFCE"/>
+                          </a:highlight>
+                          <a:latin typeface="맑은 고딕"/>
+                          <a:ea typeface="맑은 고딕"/>
+                        </a:rPr>
+                        <a:t>에이전트가</a:t>
+                      </a:r>
+                      <a:r>
+                        <a:rPr sz="1100" b="1" i="0" dirty="0">
+                          <a:solidFill>
+                            <a:srgbClr val="202020"/>
+                          </a:solidFill>
+                          <a:highlight>
+                            <a:srgbClr val="C6EFCE"/>
+                          </a:highlight>
+                          <a:latin typeface="맑은 고딕"/>
+                          <a:ea typeface="맑은 고딕"/>
+                        </a:rPr>
+                        <a:t> 웹 </a:t>
+                      </a:r>
+                      <a:r>
+                        <a:rPr sz="1100" b="1" i="0" dirty="0" err="1">
+                          <a:solidFill>
+                            <a:srgbClr val="202020"/>
+                          </a:solidFill>
+                          <a:highlight>
+                            <a:srgbClr val="C6EFCE"/>
+                          </a:highlight>
+                          <a:latin typeface="맑은 고딕"/>
+                          <a:ea typeface="맑은 고딕"/>
+                        </a:rPr>
+                        <a:t>브라우저를</a:t>
+                      </a:r>
+                      <a:r>
+                        <a:rPr sz="1100" b="1" i="0" dirty="0">
+                          <a:solidFill>
+                            <a:srgbClr val="202020"/>
+                          </a:solidFill>
+                          <a:highlight>
+                            <a:srgbClr val="C6EFCE"/>
+                          </a:highlight>
+                          <a:latin typeface="맑은 고딕"/>
+                          <a:ea typeface="맑은 고딕"/>
+                        </a:rPr>
+                        <a:t> </a:t>
+                      </a:r>
+                      <a:r>
+                        <a:rPr sz="1100" b="1" i="0" dirty="0" err="1">
+                          <a:solidFill>
+                            <a:srgbClr val="202020"/>
+                          </a:solidFill>
+                          <a:highlight>
+                            <a:srgbClr val="C6EFCE"/>
+                          </a:highlight>
+                          <a:latin typeface="맑은 고딕"/>
+                          <a:ea typeface="맑은 고딕"/>
+                        </a:rPr>
+                        <a:t>자율</a:t>
+                      </a:r>
+                      <a:r>
+                        <a:rPr sz="1100" b="1" i="0" dirty="0">
+                          <a:solidFill>
+                            <a:srgbClr val="202020"/>
+                          </a:solidFill>
+                          <a:highlight>
+                            <a:srgbClr val="C6EFCE"/>
+                          </a:highlight>
+                          <a:latin typeface="맑은 고딕"/>
+                          <a:ea typeface="맑은 고딕"/>
+                        </a:rPr>
+                        <a:t> </a:t>
+                      </a:r>
+                      <a:r>
+                        <a:rPr sz="1100" b="1" i="0" dirty="0" err="1">
+                          <a:solidFill>
+                            <a:srgbClr val="202020"/>
+                          </a:solidFill>
+                          <a:highlight>
+                            <a:srgbClr val="C6EFCE"/>
+                          </a:highlight>
+                          <a:latin typeface="맑은 고딕"/>
+                          <a:ea typeface="맑은 고딕"/>
+                        </a:rPr>
+                        <a:t>조작</a:t>
+                      </a:r>
+                      <a:r>
+                        <a:rPr sz="1100" b="1" i="0" dirty="0" err="1">
+                          <a:solidFill>
+                            <a:srgbClr val="202020"/>
+                          </a:solidFill>
+                          <a:latin typeface="맑은 고딕"/>
+                          <a:ea typeface="맑은 고딕"/>
+                        </a:rPr>
+                        <a:t>해</a:t>
+                      </a:r>
+                      <a:r>
+                        <a:rPr sz="1100" b="1" i="0" dirty="0">
+                          <a:solidFill>
+                            <a:srgbClr val="202020"/>
+                          </a:solidFill>
+                          <a:latin typeface="맑은 고딕"/>
+                          <a:ea typeface="맑은 고딕"/>
+                        </a:rPr>
+                        <a:t> </a:t>
+                      </a:r>
+                      <a:r>
+                        <a:rPr sz="1100" b="1" i="0" dirty="0" err="1">
+                          <a:solidFill>
+                            <a:srgbClr val="202020"/>
+                          </a:solidFill>
+                          <a:latin typeface="맑은 고딕"/>
+                          <a:ea typeface="맑은 고딕"/>
+                        </a:rPr>
+                        <a:t>태스크</a:t>
+                      </a:r>
+                      <a:r>
+                        <a:rPr sz="1100" b="1" i="0" dirty="0">
+                          <a:solidFill>
+                            <a:srgbClr val="202020"/>
+                          </a:solidFill>
+                          <a:latin typeface="맑은 고딕"/>
+                          <a:ea typeface="맑은 고딕"/>
+                        </a:rPr>
+                        <a:t> </a:t>
+                      </a:r>
+                      <a:r>
+                        <a:rPr sz="1100" b="1" i="0" dirty="0" err="1">
+                          <a:solidFill>
+                            <a:srgbClr val="202020"/>
+                          </a:solidFill>
+                          <a:latin typeface="맑은 고딕"/>
+                          <a:ea typeface="맑은 고딕"/>
+                        </a:rPr>
+                        <a:t>완료</a:t>
+                      </a:r>
+                      <a:endParaRPr lang="en-US" sz="1100" b="1" i="0" dirty="0">
+                        <a:solidFill>
+                          <a:srgbClr val="202020"/>
+                        </a:solidFill>
+                        <a:latin typeface="맑은 고딕"/>
+                        <a:ea typeface="맑은 고딕"/>
+                      </a:endParaRPr>
+                    </a:p>
+                    <a:p>
+                      <a:pPr marL="171450" indent="-171450" algn="l">
+                        <a:lnSpc>
+                          <a:spcPct val="106000"/>
+                        </a:lnSpc>
+                        <a:spcBef>
+                          <a:spcPts val="0"/>
+                        </a:spcBef>
+                        <a:spcAft>
+                          <a:spcPts val="200"/>
+                        </a:spcAft>
+                        <a:buFont typeface="Arial" panose="020B0604020202020204" pitchFamily="34" charset="0"/>
+                        <a:buChar char="•"/>
+                      </a:pPr>
+                      <a:r>
+                        <a:rPr lang="en-US" sz="1100" b="1" i="0" dirty="0">
+                          <a:solidFill>
+                            <a:srgbClr val="202020"/>
+                          </a:solidFill>
+                          <a:latin typeface="맑은 고딕"/>
+                          <a:ea typeface="맑은 고딕"/>
+                        </a:rPr>
+                        <a:t>Background</a:t>
+                      </a:r>
+                      <a:r>
+                        <a:rPr lang="ko-KR" altLang="en-US" sz="1100" b="1" i="0" dirty="0">
+                          <a:solidFill>
+                            <a:srgbClr val="202020"/>
+                          </a:solidFill>
+                          <a:latin typeface="맑은 고딕"/>
+                          <a:ea typeface="맑은 고딕"/>
+                        </a:rPr>
+                        <a:t>에서 태스크 처리를 위한 </a:t>
+                      </a:r>
+                      <a:r>
+                        <a:rPr lang="en-US" altLang="ko-KR" sz="1100" b="1" i="0" dirty="0">
+                          <a:solidFill>
+                            <a:srgbClr val="202020"/>
+                          </a:solidFill>
+                          <a:latin typeface="맑은 고딕"/>
+                          <a:ea typeface="맑은 고딕"/>
+                        </a:rPr>
+                        <a:t>Headless </a:t>
+                      </a:r>
+                      <a:r>
+                        <a:rPr lang="ko-KR" altLang="en-US" sz="1100" b="1" i="0" dirty="0">
+                          <a:solidFill>
+                            <a:srgbClr val="202020"/>
+                          </a:solidFill>
+                          <a:latin typeface="맑은 고딕"/>
+                          <a:ea typeface="맑은 고딕"/>
+                        </a:rPr>
+                        <a:t>브라우저 지원</a:t>
+                      </a:r>
+                      <a:endParaRPr lang="en-US" altLang="ko-KR" sz="1100" b="1" i="0" dirty="0">
+                        <a:solidFill>
+                          <a:srgbClr val="202020"/>
+                        </a:solidFill>
+                        <a:latin typeface="맑은 고딕"/>
+                        <a:ea typeface="맑은 고딕"/>
+                      </a:endParaRPr>
+                    </a:p>
+                    <a:p>
+                      <a:pPr marL="171450" indent="-171450" algn="l">
+                        <a:lnSpc>
+                          <a:spcPct val="106000"/>
+                        </a:lnSpc>
+                        <a:spcBef>
+                          <a:spcPts val="0"/>
+                        </a:spcBef>
+                        <a:spcAft>
+                          <a:spcPts val="200"/>
+                        </a:spcAft>
+                        <a:buFont typeface="Arial" panose="020B0604020202020204" pitchFamily="34" charset="0"/>
+                        <a:buChar char="•"/>
+                      </a:pPr>
+                      <a:r>
+                        <a:rPr lang="en-US" sz="1100" b="1" i="0" dirty="0">
+                          <a:solidFill>
+                            <a:srgbClr val="202020"/>
+                          </a:solidFill>
+                          <a:latin typeface="맑은 고딕"/>
+                          <a:ea typeface="맑은 고딕"/>
+                        </a:rPr>
+                        <a:t>AIOS </a:t>
+                      </a:r>
+                      <a:r>
+                        <a:rPr lang="ko-KR" altLang="en-US" sz="1100" b="1" i="0" dirty="0">
+                          <a:solidFill>
+                            <a:srgbClr val="202020"/>
+                          </a:solidFill>
+                          <a:latin typeface="맑은 고딕"/>
+                          <a:ea typeface="맑은 고딕"/>
+                        </a:rPr>
+                        <a:t>다른 </a:t>
+                      </a:r>
+                      <a:r>
+                        <a:rPr lang="en-US" altLang="ko-KR" sz="1100" b="1" i="0" dirty="0">
+                          <a:solidFill>
+                            <a:srgbClr val="202020"/>
+                          </a:solidFill>
+                          <a:latin typeface="맑은 고딕"/>
+                          <a:ea typeface="맑은 고딕"/>
+                        </a:rPr>
+                        <a:t>Agentic </a:t>
+                      </a:r>
+                      <a:r>
+                        <a:rPr lang="ko-KR" altLang="en-US" sz="1100" b="1" i="0" dirty="0">
+                          <a:solidFill>
+                            <a:srgbClr val="202020"/>
+                          </a:solidFill>
+                          <a:latin typeface="맑은 고딕"/>
+                          <a:ea typeface="맑은 고딕"/>
+                        </a:rPr>
+                        <a:t>모듈들과 상호작용할 수 있는 인터페이스 지원</a:t>
+                      </a:r>
+                      <a:endParaRPr sz="1100" b="1" i="0" dirty="0">
+                        <a:solidFill>
+                          <a:srgbClr val="202020"/>
+                        </a:solidFill>
+                        <a:latin typeface="맑은 고딕"/>
+                        <a:ea typeface="맑은 고딕"/>
+                      </a:endParaRPr>
+                    </a:p>
+                  </a:txBody>
+                  <a:tcPr marL="152400" marR="101600" marT="50800" marB="50800" anchor="ctr">
+                    <a:solidFill>
+                      <a:srgbClr val="FFFFFF"/>
+                    </a:solidFill>
+                  </a:tcPr>
+                </a:tc>
+                <a:extLst>
+                  <a:ext uri="{0D108BD9-81ED-4DB2-BD59-A6C34878D82A}">
+                    <a16:rowId xmlns:a16="http://schemas.microsoft.com/office/drawing/2014/main" val="10003"/>
+                  </a:ext>
+                </a:extLst>
+              </a:tr>
+              <a:tr h="548640">
+                <a:tc>
+                  <a:txBody>
+                    <a:bodyPr/>
+                    <a:lstStyle/>
+                    <a:p>
+                      <a:pPr algn="l"/>
+                      <a:r>
+                        <a:rPr sz="1250" b="1" i="0" dirty="0" err="1">
+                          <a:solidFill>
+                            <a:srgbClr val="FFFFFF"/>
+                          </a:solidFill>
+                          <a:latin typeface="맑은 고딕"/>
+                          <a:ea typeface="맑은 고딕"/>
+                        </a:rPr>
+                        <a:t>핵심</a:t>
+                      </a:r>
+                      <a:r>
+                        <a:rPr sz="1250" b="1" i="0" dirty="0">
+                          <a:solidFill>
+                            <a:srgbClr val="FFFFFF"/>
+                          </a:solidFill>
+                          <a:latin typeface="맑은 고딕"/>
+                          <a:ea typeface="맑은 고딕"/>
+                        </a:rPr>
+                        <a:t> </a:t>
+                      </a:r>
+                      <a:r>
+                        <a:rPr sz="1250" b="1" i="0" dirty="0" err="1">
+                          <a:solidFill>
+                            <a:srgbClr val="FFFFFF"/>
+                          </a:solidFill>
+                          <a:latin typeface="맑은 고딕"/>
+                          <a:ea typeface="맑은 고딕"/>
+                        </a:rPr>
+                        <a:t>산출물</a:t>
+                      </a:r>
+                      <a:endParaRPr sz="1250" b="1" i="0" dirty="0">
+                        <a:solidFill>
+                          <a:srgbClr val="FFFFFF"/>
+                        </a:solidFill>
+                        <a:latin typeface="맑은 고딕"/>
+                        <a:ea typeface="맑은 고딕"/>
+                      </a:endParaRPr>
+                    </a:p>
+                  </a:txBody>
+                  <a:tcPr marL="152400" marR="50800" marT="25400" marB="25400" anchor="ctr">
+                    <a:solidFill>
+                      <a:srgbClr val="1F3864"/>
+                    </a:solidFill>
+                  </a:tcPr>
+                </a:tc>
+                <a:tc>
+                  <a:txBody>
+                    <a:bodyPr/>
+                    <a:lstStyle/>
+                    <a:p>
+                      <a:pPr algn="l">
+                        <a:lnSpc>
+                          <a:spcPct val="106000"/>
+                        </a:lnSpc>
+                        <a:spcBef>
+                          <a:spcPts val="0"/>
+                        </a:spcBef>
+                        <a:spcAft>
+                          <a:spcPts val="200"/>
+                        </a:spcAft>
+                      </a:pPr>
+                      <a:r>
+                        <a:rPr lang="en-US" sz="1200" b="1" i="0" dirty="0">
+                          <a:solidFill>
+                            <a:srgbClr val="202020"/>
+                          </a:solidFill>
+                          <a:latin typeface="맑은 고딕"/>
+                          <a:ea typeface="맑은 고딕"/>
+                        </a:rPr>
+                        <a:t>Web Agent daemon / Headless</a:t>
+                      </a:r>
+                      <a:r>
+                        <a:rPr lang="ko-KR" altLang="en-US" sz="1200" b="1" i="0" dirty="0">
+                          <a:solidFill>
+                            <a:srgbClr val="202020"/>
+                          </a:solidFill>
+                          <a:latin typeface="맑은 고딕"/>
+                          <a:ea typeface="맑은 고딕"/>
+                        </a:rPr>
+                        <a:t> 브라우저</a:t>
+                      </a:r>
+                      <a:endParaRPr lang="en-US" sz="1200" b="1" i="0" dirty="0">
+                        <a:solidFill>
+                          <a:srgbClr val="202020"/>
+                        </a:solidFill>
+                        <a:latin typeface="맑은 고딕"/>
+                        <a:ea typeface="맑은 고딕"/>
+                      </a:endParaRPr>
+                    </a:p>
+                    <a:p>
+                      <a:pPr algn="l">
+                        <a:lnSpc>
+                          <a:spcPct val="106000"/>
+                        </a:lnSpc>
+                        <a:spcBef>
+                          <a:spcPts val="0"/>
+                        </a:spcBef>
+                        <a:spcAft>
+                          <a:spcPts val="200"/>
+                        </a:spcAft>
+                      </a:pPr>
+                      <a:r>
+                        <a:rPr sz="1200" b="1" i="0" dirty="0">
+                          <a:solidFill>
+                            <a:srgbClr val="202020"/>
+                          </a:solidFill>
+                          <a:latin typeface="맑은 고딕"/>
+                          <a:ea typeface="맑은 고딕"/>
+                        </a:rPr>
+                        <a:t>Architecture Design Specification (ADS)</a:t>
+                      </a:r>
+                      <a:endParaRPr sz="1000" b="1" i="0" dirty="0">
+                        <a:solidFill>
+                          <a:srgbClr val="595959"/>
+                        </a:solidFill>
+                        <a:latin typeface="맑은 고딕"/>
+                        <a:ea typeface="맑은 고딕"/>
+                      </a:endParaRPr>
+                    </a:p>
+                  </a:txBody>
+                  <a:tcPr marL="152400" marR="101600" marT="50800" marB="50800" anchor="ctr">
+                    <a:solidFill>
+                      <a:srgbClr val="FFFFFF"/>
+                    </a:solidFill>
+                  </a:tcPr>
+                </a:tc>
+                <a:extLst>
+                  <a:ext uri="{0D108BD9-81ED-4DB2-BD59-A6C34878D82A}">
+                    <a16:rowId xmlns:a16="http://schemas.microsoft.com/office/drawing/2014/main" val="10004"/>
+                  </a:ext>
+                </a:extLst>
+              </a:tr>
+              <a:tr h="411480">
+                <a:tc>
+                  <a:txBody>
+                    <a:bodyPr/>
+                    <a:lstStyle/>
+                    <a:p>
+                      <a:pPr algn="l"/>
+                      <a:r>
+                        <a:rPr sz="1250" b="1" i="0">
+                          <a:solidFill>
+                            <a:srgbClr val="FFFFFF"/>
+                          </a:solidFill>
+                          <a:latin typeface="맑은 고딕"/>
+                          <a:ea typeface="맑은 고딕"/>
+                        </a:rPr>
+                        <a:t>참여 인력</a:t>
+                      </a:r>
+                    </a:p>
+                  </a:txBody>
+                  <a:tcPr marL="152400" marR="50800" marT="25400" marB="25400" anchor="ctr">
+                    <a:solidFill>
+                      <a:srgbClr val="1F3864"/>
+                    </a:solidFill>
+                  </a:tcPr>
+                </a:tc>
+                <a:tc>
+                  <a:txBody>
+                    <a:bodyPr/>
+                    <a:lstStyle/>
+                    <a:p>
+                      <a:pPr algn="l">
+                        <a:lnSpc>
+                          <a:spcPct val="106000"/>
+                        </a:lnSpc>
+                        <a:spcBef>
+                          <a:spcPts val="0"/>
+                        </a:spcBef>
+                        <a:spcAft>
+                          <a:spcPts val="200"/>
+                        </a:spcAft>
+                      </a:pPr>
+                      <a:r>
+                        <a:rPr lang="en-US" sz="1100" b="1" i="0" dirty="0">
+                          <a:solidFill>
+                            <a:schemeClr val="tx1"/>
+                          </a:solidFill>
+                          <a:latin typeface="맑은 고딕"/>
+                          <a:ea typeface="맑은 고딕"/>
+                        </a:rPr>
+                        <a:t>SR : x</a:t>
+                      </a:r>
+                      <a:r>
+                        <a:rPr lang="ko-KR" altLang="en-US" sz="1100" b="1" i="0" dirty="0">
+                          <a:solidFill>
+                            <a:schemeClr val="tx1"/>
+                          </a:solidFill>
+                          <a:latin typeface="맑은 고딕"/>
+                          <a:ea typeface="맑은 고딕"/>
+                        </a:rPr>
+                        <a:t>명 </a:t>
+                      </a:r>
+                      <a:r>
+                        <a:rPr lang="en-US" altLang="ko-KR" sz="1100" b="1" i="0" dirty="0">
+                          <a:solidFill>
+                            <a:schemeClr val="tx1"/>
+                          </a:solidFill>
+                          <a:latin typeface="맑은 고딕"/>
+                          <a:ea typeface="맑은 고딕"/>
+                        </a:rPr>
+                        <a:t>&lt;</a:t>
+                      </a:r>
+                      <a:r>
+                        <a:rPr lang="ko-KR" altLang="en-US" sz="1100" b="1" i="0" dirty="0">
+                          <a:solidFill>
+                            <a:schemeClr val="tx1"/>
+                          </a:solidFill>
+                          <a:latin typeface="맑은 고딕"/>
+                          <a:ea typeface="맑은 고딕"/>
+                        </a:rPr>
+                        <a:t>설계 </a:t>
+                      </a:r>
+                      <a:r>
+                        <a:rPr lang="en-US" altLang="ko-KR" sz="1100" b="1" i="0" dirty="0">
+                          <a:solidFill>
+                            <a:schemeClr val="tx1"/>
+                          </a:solidFill>
+                          <a:latin typeface="맑은 고딕"/>
+                          <a:ea typeface="맑은 고딕"/>
+                        </a:rPr>
+                        <a:t>/ </a:t>
+                      </a:r>
+                      <a:r>
+                        <a:rPr lang="ko-KR" altLang="en-US" sz="1100" b="1" i="0" dirty="0">
+                          <a:solidFill>
+                            <a:schemeClr val="tx1"/>
+                          </a:solidFill>
+                          <a:latin typeface="맑은 고딕"/>
+                          <a:ea typeface="맑은 고딕"/>
+                        </a:rPr>
+                        <a:t>구현</a:t>
+                      </a:r>
+                      <a:r>
+                        <a:rPr lang="en-US" altLang="ko-KR" sz="1100" b="1" i="0" dirty="0">
+                          <a:solidFill>
+                            <a:schemeClr val="tx1"/>
+                          </a:solidFill>
+                          <a:latin typeface="맑은 고딕"/>
+                          <a:ea typeface="맑은 고딕"/>
+                        </a:rPr>
+                        <a:t>&gt;</a:t>
+                      </a:r>
+                    </a:p>
+                    <a:p>
+                      <a:pPr algn="l">
+                        <a:lnSpc>
+                          <a:spcPct val="106000"/>
+                        </a:lnSpc>
+                        <a:spcBef>
+                          <a:spcPts val="0"/>
+                        </a:spcBef>
+                        <a:spcAft>
+                          <a:spcPts val="200"/>
+                        </a:spcAft>
+                      </a:pPr>
+                      <a:r>
+                        <a:rPr lang="en-US" sz="1100" b="1" i="0" dirty="0">
+                          <a:solidFill>
+                            <a:schemeClr val="tx1"/>
+                          </a:solidFill>
+                          <a:latin typeface="맑은 고딕"/>
+                          <a:ea typeface="맑은 고딕"/>
+                        </a:rPr>
+                        <a:t>VD</a:t>
+                      </a:r>
+                      <a:r>
+                        <a:rPr lang="ko-KR" altLang="en-US" sz="1100" b="1" i="0" dirty="0">
+                          <a:solidFill>
+                            <a:schemeClr val="tx1"/>
+                          </a:solidFill>
+                          <a:latin typeface="맑은 고딕"/>
+                          <a:ea typeface="맑은 고딕"/>
+                        </a:rPr>
+                        <a:t> </a:t>
+                      </a:r>
+                      <a:r>
+                        <a:rPr lang="en-US" altLang="ko-KR" sz="1100" b="1" i="0" dirty="0">
+                          <a:solidFill>
+                            <a:schemeClr val="tx1"/>
+                          </a:solidFill>
+                          <a:latin typeface="맑은 고딕"/>
+                          <a:ea typeface="맑은 고딕"/>
+                        </a:rPr>
+                        <a:t>:</a:t>
+                      </a:r>
+                      <a:r>
+                        <a:rPr lang="ko-KR" altLang="en-US" sz="1100" b="1" i="0" dirty="0">
+                          <a:solidFill>
+                            <a:schemeClr val="tx1"/>
+                          </a:solidFill>
+                          <a:latin typeface="맑은 고딕"/>
+                          <a:ea typeface="맑은 고딕"/>
+                        </a:rPr>
+                        <a:t> </a:t>
+                      </a:r>
+                      <a:r>
+                        <a:rPr lang="en-US" altLang="ko-KR" sz="1100" b="1" i="0" dirty="0">
+                          <a:solidFill>
+                            <a:schemeClr val="tx1"/>
+                          </a:solidFill>
+                          <a:latin typeface="맑은 고딕"/>
+                          <a:ea typeface="맑은 고딕"/>
+                        </a:rPr>
+                        <a:t>x</a:t>
+                      </a:r>
+                      <a:r>
+                        <a:rPr lang="ko-KR" altLang="en-US" sz="1100" b="1" i="0" dirty="0">
+                          <a:solidFill>
+                            <a:schemeClr val="tx1"/>
+                          </a:solidFill>
+                          <a:latin typeface="맑은 고딕"/>
+                          <a:ea typeface="맑은 고딕"/>
+                        </a:rPr>
+                        <a:t>명 </a:t>
+                      </a:r>
+                      <a:r>
+                        <a:rPr lang="en-US" altLang="ko-KR" sz="1100" b="1" i="0" dirty="0">
+                          <a:solidFill>
+                            <a:schemeClr val="tx1"/>
+                          </a:solidFill>
+                          <a:latin typeface="맑은 고딕"/>
+                          <a:ea typeface="맑은 고딕"/>
+                        </a:rPr>
+                        <a:t>&lt;</a:t>
+                      </a:r>
+                      <a:r>
+                        <a:rPr lang="ko-KR" altLang="en-US" sz="1100" b="1" i="0" dirty="0">
+                          <a:solidFill>
+                            <a:schemeClr val="tx1"/>
+                          </a:solidFill>
+                          <a:latin typeface="맑은 고딕"/>
+                          <a:ea typeface="맑은 고딕"/>
+                        </a:rPr>
+                        <a:t>설계 리뷰</a:t>
+                      </a:r>
+                      <a:r>
+                        <a:rPr lang="en-US" altLang="ko-KR" sz="1100" b="1" i="0" dirty="0">
+                          <a:solidFill>
+                            <a:schemeClr val="tx1"/>
+                          </a:solidFill>
+                          <a:latin typeface="맑은 고딕"/>
+                          <a:ea typeface="맑은 고딕"/>
+                        </a:rPr>
+                        <a:t>&gt;</a:t>
+                      </a:r>
+                      <a:endParaRPr sz="1100" b="1" i="1" dirty="0">
+                        <a:solidFill>
+                          <a:srgbClr val="7F7F7F"/>
+                        </a:solidFill>
+                        <a:latin typeface="맑은 고딕"/>
+                        <a:ea typeface="맑은 고딕"/>
+                      </a:endParaRPr>
+                    </a:p>
+                  </a:txBody>
+                  <a:tcPr marL="152400" marR="101600" marT="50800" marB="50800" anchor="ctr">
+                    <a:solidFill>
+                      <a:srgbClr val="FFFFFF"/>
+                    </a:solidFill>
+                  </a:tcPr>
+                </a:tc>
+                <a:extLst>
+                  <a:ext uri="{0D108BD9-81ED-4DB2-BD59-A6C34878D82A}">
+                    <a16:rowId xmlns:a16="http://schemas.microsoft.com/office/drawing/2014/main" val="10005"/>
+                  </a:ext>
+                </a:extLst>
+              </a:tr>
+              <a:tr h="411480">
+                <a:tc>
+                  <a:txBody>
+                    <a:bodyPr/>
+                    <a:lstStyle/>
+                    <a:p>
+                      <a:pPr algn="l"/>
+                      <a:r>
+                        <a:rPr sz="1250" b="1" i="0">
+                          <a:solidFill>
+                            <a:srgbClr val="FFFFFF"/>
+                          </a:solidFill>
+                          <a:latin typeface="맑은 고딕"/>
+                          <a:ea typeface="맑은 고딕"/>
+                        </a:rPr>
+                        <a:t>R&amp;R · 역할</a:t>
+                      </a:r>
+                    </a:p>
+                  </a:txBody>
+                  <a:tcPr marL="152400" marR="50800" marT="25400" marB="25400" anchor="ctr">
+                    <a:solidFill>
+                      <a:srgbClr val="1F3864"/>
+                    </a:solidFill>
+                  </a:tcPr>
+                </a:tc>
+                <a:tc>
+                  <a:txBody>
+                    <a:bodyPr/>
+                    <a:lstStyle/>
+                    <a:p>
+                      <a:pPr algn="l">
+                        <a:lnSpc>
+                          <a:spcPct val="106000"/>
+                        </a:lnSpc>
+                        <a:spcBef>
+                          <a:spcPts val="0"/>
+                        </a:spcBef>
+                        <a:spcAft>
+                          <a:spcPts val="200"/>
+                        </a:spcAft>
+                      </a:pPr>
+                      <a:r>
+                        <a:rPr lang="en-US" sz="1100" b="1" i="0" dirty="0">
+                          <a:solidFill>
+                            <a:schemeClr val="tx1"/>
+                          </a:solidFill>
+                          <a:latin typeface="맑은 고딕"/>
+                          <a:ea typeface="맑은 고딕"/>
+                        </a:rPr>
+                        <a:t>S/W </a:t>
+                      </a:r>
+                      <a:r>
+                        <a:rPr lang="ko-KR" altLang="en-US" sz="1100" b="1" i="0" dirty="0">
+                          <a:solidFill>
+                            <a:schemeClr val="tx1"/>
+                          </a:solidFill>
+                          <a:latin typeface="맑은 고딕"/>
+                          <a:ea typeface="맑은 고딕"/>
+                        </a:rPr>
+                        <a:t>설계 및 </a:t>
+                      </a:r>
+                      <a:r>
+                        <a:rPr lang="en-US" altLang="ko-KR" sz="1100" b="1" i="0" dirty="0">
+                          <a:solidFill>
+                            <a:schemeClr val="tx1"/>
+                          </a:solidFill>
+                          <a:latin typeface="맑은 고딕"/>
+                          <a:ea typeface="맑은 고딕"/>
+                        </a:rPr>
+                        <a:t>TL</a:t>
+                      </a:r>
+                      <a:endParaRPr sz="1100" b="1" i="0" dirty="0">
+                        <a:solidFill>
+                          <a:schemeClr val="tx1"/>
+                        </a:solidFill>
+                        <a:latin typeface="맑은 고딕"/>
+                        <a:ea typeface="맑은 고딕"/>
+                      </a:endParaRPr>
+                    </a:p>
+                  </a:txBody>
+                  <a:tcPr marL="152400" marR="101600" marT="50800" marB="50800" anchor="ctr">
+                    <a:solidFill>
+                      <a:srgbClr val="FFFFFF"/>
+                    </a:solidFill>
+                  </a:tcPr>
+                </a:tc>
+                <a:extLst>
+                  <a:ext uri="{0D108BD9-81ED-4DB2-BD59-A6C34878D82A}">
+                    <a16:rowId xmlns:a16="http://schemas.microsoft.com/office/drawing/2014/main" val="10006"/>
+                  </a:ext>
+                </a:extLst>
+              </a:tr>
+              <a:tr h="411480">
+                <a:tc>
+                  <a:txBody>
+                    <a:bodyPr/>
+                    <a:lstStyle/>
+                    <a:p>
+                      <a:pPr algn="l"/>
+                      <a:r>
+                        <a:rPr sz="1250" b="1" i="0">
+                          <a:solidFill>
+                            <a:srgbClr val="FFFFFF"/>
+                          </a:solidFill>
+                          <a:latin typeface="맑은 고딕"/>
+                          <a:ea typeface="맑은 고딕"/>
+                        </a:rPr>
+                        <a:t>일정</a:t>
+                      </a:r>
+                    </a:p>
+                  </a:txBody>
+                  <a:tcPr marL="152400" marR="50800" marT="25400" marB="25400" anchor="ctr">
+                    <a:solidFill>
+                      <a:srgbClr val="1F3864"/>
+                    </a:solidFill>
+                  </a:tcPr>
+                </a:tc>
+                <a:tc>
+                  <a:txBody>
+                    <a:bodyPr/>
+                    <a:lstStyle/>
+                    <a:p>
+                      <a:pPr algn="l">
+                        <a:lnSpc>
+                          <a:spcPct val="106000"/>
+                        </a:lnSpc>
+                        <a:spcBef>
+                          <a:spcPts val="0"/>
+                        </a:spcBef>
+                        <a:spcAft>
+                          <a:spcPts val="200"/>
+                        </a:spcAft>
+                      </a:pPr>
+                      <a:r>
+                        <a:rPr lang="en-US" altLang="ko-KR" sz="1100" b="1" i="0" dirty="0">
+                          <a:solidFill>
+                            <a:schemeClr val="tx1"/>
+                          </a:solidFill>
+                          <a:latin typeface="맑은 고딕"/>
+                          <a:ea typeface="맑은 고딕"/>
+                        </a:rPr>
+                        <a:t>`26.01 ~ `26.12</a:t>
+                      </a:r>
+                    </a:p>
+                  </a:txBody>
+                  <a:tcPr marL="152400" marR="101600" marT="50800" marB="50800" anchor="ctr">
+                    <a:solidFill>
+                      <a:srgbClr val="FFFFFF"/>
+                    </a:solidFill>
+                  </a:tcPr>
+                </a:tc>
+                <a:extLst>
+                  <a:ext uri="{0D108BD9-81ED-4DB2-BD59-A6C34878D82A}">
+                    <a16:rowId xmlns:a16="http://schemas.microsoft.com/office/drawing/2014/main" val="10007"/>
+                  </a:ext>
+                </a:extLst>
+              </a:tr>
+            </a:tbl>
+          </a:graphicData>
+        </a:graphic>
+      </p:graphicFrame>
+      <p:sp>
+        <p:nvSpPr>
+          <p:cNvPr id="10" name="Rounded Rectangle 9"/>
+          <p:cNvSpPr/>
+          <p:nvPr/>
+        </p:nvSpPr>
+        <p:spPr>
+          <a:xfrm>
+            <a:off x="640080" y="5961888"/>
+            <a:ext cx="10908792" cy="457200"/>
+          </a:xfrm>
+          <a:prstGeom prst="roundRect">
+            <a:avLst>
+              <a:gd name="adj" fmla="val 12000"/>
+            </a:avLst>
+          </a:prstGeom>
+          <a:solidFill>
+            <a:srgbClr val="1F3864"/>
+          </a:solidFill>
+          <a:ln>
+            <a:noFill/>
+          </a:ln>
+          <a:effectLst/>
+        </p:spPr>
+        <p:style>
+          <a:lnRef idx="1">
+            <a:schemeClr val="accent1"/>
+          </a:lnRef>
+          <a:fillRef idx="3">
+            <a:schemeClr val="accent1"/>
+          </a:fillRef>
+          <a:effectRef idx="2">
+            <a:schemeClr val="accent1"/>
+          </a:effectRef>
+          <a:fontRef idx="minor">
+            <a:schemeClr val="lt1"/>
+          </a:fontRef>
+        </p:style>
+        <p:txBody>
+          <a:bodyPr rtlCol="0" anchor="ctr"/>
+          <a:lstStyle/>
+          <a:p>
+            <a:pPr algn="ctr"/>
+            <a:endParaRPr/>
+          </a:p>
+        </p:txBody>
+      </p:sp>
+      <p:sp>
+        <p:nvSpPr>
+          <p:cNvPr id="11" name="TextBox 10"/>
+          <p:cNvSpPr txBox="1"/>
+          <p:nvPr/>
+        </p:nvSpPr>
+        <p:spPr>
+          <a:xfrm>
+            <a:off x="868680" y="6089178"/>
+            <a:ext cx="10469880" cy="202620"/>
+          </a:xfrm>
+          <a:prstGeom prst="rect">
+            <a:avLst/>
+          </a:prstGeom>
+          <a:noFill/>
+        </p:spPr>
+        <p:txBody>
+          <a:bodyPr wrap="square" lIns="25400" tIns="12700" rIns="25400" bIns="12700" anchor="ctr">
+            <a:spAutoFit/>
+          </a:bodyPr>
+          <a:lstStyle/>
+          <a:p>
+            <a:pPr algn="l">
+              <a:lnSpc>
+                <a:spcPct val="100000"/>
+              </a:lnSpc>
+              <a:spcBef>
+                <a:spcPts val="0"/>
+              </a:spcBef>
+              <a:spcAft>
+                <a:spcPts val="400"/>
+              </a:spcAft>
+            </a:pPr>
+            <a:r>
+              <a:rPr sz="1100" b="1" i="0" dirty="0">
+                <a:solidFill>
+                  <a:srgbClr val="4FA9C4"/>
+                </a:solidFill>
+                <a:latin typeface="맑은 고딕"/>
+                <a:ea typeface="맑은 고딕"/>
+              </a:rPr>
+              <a:t>한 줄 </a:t>
+            </a:r>
+            <a:r>
+              <a:rPr sz="1100" b="1" i="0" dirty="0" err="1">
+                <a:solidFill>
+                  <a:srgbClr val="4FA9C4"/>
+                </a:solidFill>
+                <a:latin typeface="맑은 고딕"/>
+                <a:ea typeface="맑은 고딕"/>
+              </a:rPr>
+              <a:t>정의</a:t>
+            </a:r>
+            <a:r>
+              <a:rPr sz="1100" b="1" i="0" dirty="0">
+                <a:solidFill>
+                  <a:srgbClr val="4FA9C4"/>
+                </a:solidFill>
+                <a:latin typeface="맑은 고딕"/>
+                <a:ea typeface="맑은 고딕"/>
+              </a:rPr>
+              <a:t>  </a:t>
+            </a:r>
+            <a:r>
+              <a:rPr lang="ko-KR" altLang="en-US" sz="1150" b="0" i="0" dirty="0">
+                <a:solidFill>
+                  <a:srgbClr val="FFFFFF"/>
+                </a:solidFill>
+                <a:latin typeface="맑은 고딕"/>
+                <a:ea typeface="맑은 고딕"/>
+              </a:rPr>
+              <a:t> 사용자의 자연어 의도를 이해하고 웹 브라우저를 자율 조작해 태스크를 완료하는 </a:t>
+            </a:r>
+            <a:r>
+              <a:rPr lang="en-US" altLang="ko-KR" sz="1150" b="0" i="0" dirty="0">
+                <a:solidFill>
+                  <a:srgbClr val="FFFFFF"/>
+                </a:solidFill>
+                <a:latin typeface="맑은 고딕"/>
+                <a:ea typeface="맑은 고딕"/>
+              </a:rPr>
+              <a:t>On-Device </a:t>
+            </a:r>
+            <a:r>
+              <a:rPr lang="ko-KR" altLang="en-US" sz="1150" b="0" i="0" dirty="0" err="1">
+                <a:solidFill>
+                  <a:srgbClr val="FFFFFF"/>
+                </a:solidFill>
+                <a:latin typeface="맑은 고딕"/>
+                <a:ea typeface="맑은 고딕"/>
+              </a:rPr>
+              <a:t>하네스</a:t>
+            </a:r>
+            <a:r>
+              <a:rPr lang="ko-KR" altLang="en-US" sz="1150" b="0" i="0" dirty="0">
+                <a:solidFill>
+                  <a:srgbClr val="FFFFFF"/>
+                </a:solidFill>
+                <a:latin typeface="맑은 고딕"/>
+                <a:ea typeface="맑은 고딕"/>
+              </a:rPr>
+              <a:t> 기반 </a:t>
+            </a:r>
+            <a:r>
+              <a:rPr lang="en-US" altLang="ko-KR" sz="1150" b="0" i="0" dirty="0">
+                <a:solidFill>
+                  <a:srgbClr val="FFFFFF"/>
+                </a:solidFill>
+                <a:latin typeface="맑은 고딕"/>
+                <a:ea typeface="맑은 고딕"/>
+              </a:rPr>
+              <a:t>AI Web Agent</a:t>
+            </a:r>
+            <a:endParaRPr sz="1150" b="0" i="0" dirty="0">
+              <a:solidFill>
+                <a:srgbClr val="FFFFFF"/>
+              </a:solidFill>
+              <a:latin typeface="맑은 고딕"/>
+              <a:ea typeface="맑은 고딕"/>
+            </a:endParaRPr>
           </a:p>
         </p:txBody>
       </p:sp>
